--- a/Mapped Curriculum Lessons/Grade 7/Lesson 14 - Changing Text Case/Changing Text Case - Slides.pptx
+++ b/Mapped Curriculum Lessons/Grade 7/Lesson 14 - Changing Text Case/Changing Text Case - Slides.pptx
@@ -2,28 +2,28 @@
 <file path=ppt/presentation.xml><?xml version="1.0" encoding="utf-8"?>
 <p:presentation xmlns:p="http://schemas.openxmlformats.org/presentationml/2006/main" embedTrueTypeFonts="1" saveSubsetFonts="0">
   <p:sldMasterIdLst>
-    <p:sldMasterId xmlns:r="http://schemas.openxmlformats.org/officeDocument/2006/relationships" id="2147483648" r:id="R44b01355d03f48b0"/>
+    <p:sldMasterId xmlns:r="http://schemas.openxmlformats.org/officeDocument/2006/relationships" id="2147483648" r:id="R7bd5e0f7b482491f"/>
   </p:sldMasterIdLst>
   <p:notesMasterIdLst>
-    <p:notesMasterId xmlns:r="http://schemas.openxmlformats.org/officeDocument/2006/relationships" r:id="Rffd6e9b2628d4bee"/>
+    <p:notesMasterId xmlns:r="http://schemas.openxmlformats.org/officeDocument/2006/relationships" r:id="R8dcc887f03224646"/>
   </p:notesMasterIdLst>
   <p:sldIdLst>
-    <p:sldId xmlns:r="http://schemas.openxmlformats.org/officeDocument/2006/relationships" id="256" r:id="R14b25059eaaa470d"/>
-    <p:sldId xmlns:r="http://schemas.openxmlformats.org/officeDocument/2006/relationships" id="257" r:id="R2a70e7d066ff49c6"/>
-    <p:sldId xmlns:r="http://schemas.openxmlformats.org/officeDocument/2006/relationships" id="258" r:id="R8d8a2475da554191"/>
-    <p:sldId xmlns:r="http://schemas.openxmlformats.org/officeDocument/2006/relationships" id="259" r:id="R3d0ea3e563ed4582"/>
-    <p:sldId xmlns:r="http://schemas.openxmlformats.org/officeDocument/2006/relationships" id="260" r:id="Re25ca792c50a4621"/>
-    <p:sldId xmlns:r="http://schemas.openxmlformats.org/officeDocument/2006/relationships" id="261" r:id="R99fc082493f04db8"/>
-    <p:sldId xmlns:r="http://schemas.openxmlformats.org/officeDocument/2006/relationships" id="262" r:id="Ra3e487916e224b94"/>
-    <p:sldId xmlns:r="http://schemas.openxmlformats.org/officeDocument/2006/relationships" id="263" r:id="Rc119527a23e048ca"/>
-    <p:sldId xmlns:r="http://schemas.openxmlformats.org/officeDocument/2006/relationships" id="264" r:id="R0cb4713eaae54531"/>
+    <p:sldId xmlns:r="http://schemas.openxmlformats.org/officeDocument/2006/relationships" id="256" r:id="Rc22dce0641354f5a"/>
+    <p:sldId xmlns:r="http://schemas.openxmlformats.org/officeDocument/2006/relationships" id="257" r:id="R27ebfbc10289410e"/>
+    <p:sldId xmlns:r="http://schemas.openxmlformats.org/officeDocument/2006/relationships" id="258" r:id="Rc8d33e70e995421c"/>
+    <p:sldId xmlns:r="http://schemas.openxmlformats.org/officeDocument/2006/relationships" id="259" r:id="R3764a69c1bef4e22"/>
+    <p:sldId xmlns:r="http://schemas.openxmlformats.org/officeDocument/2006/relationships" id="260" r:id="Rc8837b023b5b492a"/>
+    <p:sldId xmlns:r="http://schemas.openxmlformats.org/officeDocument/2006/relationships" id="261" r:id="Rf1e21f3934ad4baf"/>
+    <p:sldId xmlns:r="http://schemas.openxmlformats.org/officeDocument/2006/relationships" id="262" r:id="R390258e6bce04f4e"/>
+    <p:sldId xmlns:r="http://schemas.openxmlformats.org/officeDocument/2006/relationships" id="263" r:id="R4daa3d364bf64b24"/>
+    <p:sldId xmlns:r="http://schemas.openxmlformats.org/officeDocument/2006/relationships" id="264" r:id="Rb63e75c57490469d"/>
   </p:sldIdLst>
   <p:sldSz cx="12192000" cy="6858000"/>
   <p:notesSz cx="6858000" cy="9144000"/>
   <p:embeddedFontLst>
     <p:embeddedFont>
       <p:font typeface="JetBrains Mono"/>
-      <p:regular xmlns:r="http://schemas.openxmlformats.org/officeDocument/2006/relationships" r:id="R9cdd53c2c50c41e0"/>
+      <p:regular xmlns:r="http://schemas.openxmlformats.org/officeDocument/2006/relationships" r:id="Ra5473a9f81ed4a56"/>
     </p:embeddedFont>
   </p:embeddedFontLst>
 </p:presentation>
@@ -1071,7 +1071,7 @@
           <p:nvPr/>
         </p:nvPicPr>
         <p:blipFill rotWithShape="1">
-          <a:blip xmlns:r="http://schemas.openxmlformats.org/officeDocument/2006/relationships" xmlns:a="http://schemas.openxmlformats.org/drawingml/2006/main" r:embed="Rc4024c37e1f84836"/>
+          <a:blip xmlns:r="http://schemas.openxmlformats.org/officeDocument/2006/relationships" xmlns:a="http://schemas.openxmlformats.org/drawingml/2006/main" r:embed="R77c2490e64e84f56"/>
           <a:stretch xmlns:a="http://schemas.openxmlformats.org/drawingml/2006/main"/>
         </p:blipFill>
         <p:spPr>
@@ -1451,7 +1451,7 @@
           <p:nvPr/>
         </p:nvPicPr>
         <p:blipFill rotWithShape="1">
-          <a:blip xmlns:r="http://schemas.openxmlformats.org/officeDocument/2006/relationships" xmlns:a="http://schemas.openxmlformats.org/drawingml/2006/main" r:embed="Re717daf95151440a">
+          <a:blip xmlns:r="http://schemas.openxmlformats.org/officeDocument/2006/relationships" xmlns:a="http://schemas.openxmlformats.org/drawingml/2006/main" r:embed="Rfe194579659a4194">
             <a:alphaModFix amt="28000"/>
           </a:blip>
           <a:stretch xmlns:a="http://schemas.openxmlformats.org/drawingml/2006/main"/>
@@ -1664,7 +1664,7 @@
           <p:nvPr/>
         </p:nvPicPr>
         <p:blipFill rotWithShape="1">
-          <a:blip xmlns:r="http://schemas.openxmlformats.org/officeDocument/2006/relationships" xmlns:a="http://schemas.openxmlformats.org/drawingml/2006/main" r:embed="Re783f0c17efb4e99">
+          <a:blip xmlns:r="http://schemas.openxmlformats.org/officeDocument/2006/relationships" xmlns:a="http://schemas.openxmlformats.org/drawingml/2006/main" r:embed="R6f8d99fe58c343fc">
             <a:alphaModFix amt="28000"/>
           </a:blip>
           <a:stretch xmlns:a="http://schemas.openxmlformats.org/drawingml/2006/main"/>
@@ -1899,7 +1899,7 @@
           <p:nvPr/>
         </p:nvPicPr>
         <p:blipFill rotWithShape="1">
-          <a:blip xmlns:r="http://schemas.openxmlformats.org/officeDocument/2006/relationships" xmlns:a="http://schemas.openxmlformats.org/drawingml/2006/main" r:embed="R9358fd6c82e94af2">
+          <a:blip xmlns:r="http://schemas.openxmlformats.org/officeDocument/2006/relationships" xmlns:a="http://schemas.openxmlformats.org/drawingml/2006/main" r:embed="Rac4220b7a5cd4236">
             <a:alphaModFix amt="28000"/>
           </a:blip>
           <a:stretch xmlns:a="http://schemas.openxmlformats.org/drawingml/2006/main"/>
@@ -2176,7 +2176,7 @@
           <p:nvPr/>
         </p:nvPicPr>
         <p:blipFill rotWithShape="1">
-          <a:blip xmlns:r="http://schemas.openxmlformats.org/officeDocument/2006/relationships" xmlns:a="http://schemas.openxmlformats.org/drawingml/2006/main" r:embed="R3ff920c0770e4d4c">
+          <a:blip xmlns:r="http://schemas.openxmlformats.org/officeDocument/2006/relationships" xmlns:a="http://schemas.openxmlformats.org/drawingml/2006/main" r:embed="Rd23b470a69c8417a">
             <a:alphaModFix amt="28000"/>
           </a:blip>
           <a:stretch xmlns:a="http://schemas.openxmlformats.org/drawingml/2006/main"/>
@@ -2451,7 +2451,7 @@
           <p:nvPr/>
         </p:nvPicPr>
         <p:blipFill rotWithShape="1">
-          <a:blip xmlns:r="http://schemas.openxmlformats.org/officeDocument/2006/relationships" xmlns:a="http://schemas.openxmlformats.org/drawingml/2006/main" r:embed="Rbf87d1138bfd4c5a">
+          <a:blip xmlns:r="http://schemas.openxmlformats.org/officeDocument/2006/relationships" xmlns:a="http://schemas.openxmlformats.org/drawingml/2006/main" r:embed="R8070e441ecc941d4">
             <a:alphaModFix amt="28000"/>
           </a:blip>
           <a:stretch xmlns:a="http://schemas.openxmlformats.org/drawingml/2006/main"/>
@@ -2875,7 +2875,7 @@
           <p:nvPr/>
         </p:nvPicPr>
         <p:blipFill rotWithShape="1">
-          <a:blip xmlns:r="http://schemas.openxmlformats.org/officeDocument/2006/relationships" xmlns:a="http://schemas.openxmlformats.org/drawingml/2006/main" r:embed="R1056a89c188f4ab0">
+          <a:blip xmlns:r="http://schemas.openxmlformats.org/officeDocument/2006/relationships" xmlns:a="http://schemas.openxmlformats.org/drawingml/2006/main" r:embed="Rea05f77cfdcd4777">
             <a:alphaModFix amt="28000"/>
           </a:blip>
           <a:stretch xmlns:a="http://schemas.openxmlformats.org/drawingml/2006/main"/>
@@ -3016,7 +3016,7 @@
           <p:nvPr/>
         </p:nvPicPr>
         <p:blipFill rotWithShape="1">
-          <a:blip xmlns:r="http://schemas.openxmlformats.org/officeDocument/2006/relationships" xmlns:a="http://schemas.openxmlformats.org/drawingml/2006/main" r:embed="R7bee4f66c36a43b2">
+          <a:blip xmlns:r="http://schemas.openxmlformats.org/officeDocument/2006/relationships" xmlns:a="http://schemas.openxmlformats.org/drawingml/2006/main" r:embed="R2bd4a238c6f1407c">
             <a:alphaModFix amt="28000"/>
           </a:blip>
           <a:stretch xmlns:a="http://schemas.openxmlformats.org/drawingml/2006/main"/>
@@ -3130,7 +3130,7 @@
           <p:nvPr/>
         </p:nvPicPr>
         <p:blipFill rotWithShape="1">
-          <a:blip xmlns:r="http://schemas.openxmlformats.org/officeDocument/2006/relationships" xmlns:a="http://schemas.openxmlformats.org/drawingml/2006/main" r:embed="Re0dd4dba6816470b">
+          <a:blip xmlns:r="http://schemas.openxmlformats.org/officeDocument/2006/relationships" xmlns:a="http://schemas.openxmlformats.org/drawingml/2006/main" r:embed="R20cbad09df8845d8">
             <a:alphaModFix amt="28000"/>
           </a:blip>
           <a:stretch xmlns:a="http://schemas.openxmlformats.org/drawingml/2006/main"/>
@@ -3457,7 +3457,7 @@
           <p:nvPr/>
         </p:nvPicPr>
         <p:blipFill rotWithShape="1">
-          <a:blip xmlns:r="http://schemas.openxmlformats.org/officeDocument/2006/relationships" xmlns:a="http://schemas.openxmlformats.org/drawingml/2006/main" r:embed="Rd66e6d08bfa6474b">
+          <a:blip xmlns:r="http://schemas.openxmlformats.org/officeDocument/2006/relationships" xmlns:a="http://schemas.openxmlformats.org/drawingml/2006/main" r:embed="R2c1ac3aec55f4d99">
             <a:alphaModFix amt="28000"/>
           </a:blip>
           <a:stretch xmlns:a="http://schemas.openxmlformats.org/drawingml/2006/main"/>
@@ -3745,7 +3745,7 @@
           <p:nvPr/>
         </p:nvPicPr>
         <p:blipFill rotWithShape="1">
-          <a:blip xmlns:r="http://schemas.openxmlformats.org/officeDocument/2006/relationships" xmlns:a="http://schemas.openxmlformats.org/drawingml/2006/main" r:embed="Rb5d82f96c2ee41cf">
+          <a:blip xmlns:r="http://schemas.openxmlformats.org/officeDocument/2006/relationships" xmlns:a="http://schemas.openxmlformats.org/drawingml/2006/main" r:embed="Rde2274594cf043ac">
             <a:alphaModFix amt="28000"/>
           </a:blip>
           <a:stretch xmlns:a="http://schemas.openxmlformats.org/drawingml/2006/main"/>
@@ -3982,17 +3982,17 @@
   </p:cSld>
   <p:clrMap bg1="lt1" tx1="dk1" bg2="lt2" tx2="dk2" accent1="accent1" accent2="accent2" accent3="accent3" accent4="accent4" accent5="accent5" accent6="accent6" hlink="hlink" folHlink="folHlink"/>
   <p:sldLayoutIdLst>
-    <p:sldLayoutId xmlns:r="http://schemas.openxmlformats.org/officeDocument/2006/relationships" id="2147483649" r:id="Rf997a6f8dfca4266"/>
-    <p:sldLayoutId xmlns:r="http://schemas.openxmlformats.org/officeDocument/2006/relationships" id="2147483650" r:id="R760cea70a2f54c47"/>
-    <p:sldLayoutId xmlns:r="http://schemas.openxmlformats.org/officeDocument/2006/relationships" id="2147483651" r:id="R9e6b5c66123e4025"/>
-    <p:sldLayoutId xmlns:r="http://schemas.openxmlformats.org/officeDocument/2006/relationships" id="2147483652" r:id="R5288c8e5a9f64fdf"/>
-    <p:sldLayoutId xmlns:r="http://schemas.openxmlformats.org/officeDocument/2006/relationships" id="2147483653" r:id="R94057e9162254e6b"/>
-    <p:sldLayoutId xmlns:r="http://schemas.openxmlformats.org/officeDocument/2006/relationships" id="2147483654" r:id="R2f27e33b89e4494a"/>
-    <p:sldLayoutId xmlns:r="http://schemas.openxmlformats.org/officeDocument/2006/relationships" id="2147483655" r:id="R0d8ac74bc8124af0"/>
-    <p:sldLayoutId xmlns:r="http://schemas.openxmlformats.org/officeDocument/2006/relationships" id="2147483656" r:id="R27ee7fa879d04e16"/>
-    <p:sldLayoutId xmlns:r="http://schemas.openxmlformats.org/officeDocument/2006/relationships" id="2147483657" r:id="Ra0b0d30fb8bd4de4"/>
-    <p:sldLayoutId xmlns:r="http://schemas.openxmlformats.org/officeDocument/2006/relationships" id="2147483658" r:id="R937b7963661d43ba"/>
-    <p:sldLayoutId xmlns:r="http://schemas.openxmlformats.org/officeDocument/2006/relationships" id="2147483659" r:id="R65dffb4e129441bd"/>
+    <p:sldLayoutId xmlns:r="http://schemas.openxmlformats.org/officeDocument/2006/relationships" id="2147483649" r:id="R8ab085faccb94c69"/>
+    <p:sldLayoutId xmlns:r="http://schemas.openxmlformats.org/officeDocument/2006/relationships" id="2147483650" r:id="R8ca5d93300614db2"/>
+    <p:sldLayoutId xmlns:r="http://schemas.openxmlformats.org/officeDocument/2006/relationships" id="2147483651" r:id="Ra127be8c10944df8"/>
+    <p:sldLayoutId xmlns:r="http://schemas.openxmlformats.org/officeDocument/2006/relationships" id="2147483652" r:id="Rdaff235385204041"/>
+    <p:sldLayoutId xmlns:r="http://schemas.openxmlformats.org/officeDocument/2006/relationships" id="2147483653" r:id="Rb695ca1a2b6d40db"/>
+    <p:sldLayoutId xmlns:r="http://schemas.openxmlformats.org/officeDocument/2006/relationships" id="2147483654" r:id="R1b2681a5695c49f4"/>
+    <p:sldLayoutId xmlns:r="http://schemas.openxmlformats.org/officeDocument/2006/relationships" id="2147483655" r:id="Rc5f70240886c4dd5"/>
+    <p:sldLayoutId xmlns:r="http://schemas.openxmlformats.org/officeDocument/2006/relationships" id="2147483656" r:id="R37e9fff1e2574c58"/>
+    <p:sldLayoutId xmlns:r="http://schemas.openxmlformats.org/officeDocument/2006/relationships" id="2147483657" r:id="Ref3ef6f8881745ce"/>
+    <p:sldLayoutId xmlns:r="http://schemas.openxmlformats.org/officeDocument/2006/relationships" id="2147483658" r:id="R6e95e2e00dfd46b3"/>
+    <p:sldLayoutId xmlns:r="http://schemas.openxmlformats.org/officeDocument/2006/relationships" id="2147483659" r:id="R892f81504200451a"/>
   </p:sldLayoutIdLst>
   <p:hf hdr="0" ftr="0" dt="0"/>
   <p:txStyles>
@@ -7820,73 +7820,7 @@
                 <a:ea typeface="Calibri"/>
                 <a:cs typeface="Calibri"/>
               </a:rPr>
-              <a:t>. Display </a:t>
-            </a:r>
-            <a:r>
-              <a:rPr sz="2400" b="0">
-                <a:solidFill>
-                  <a:srgbClr val="067D17"/>
-                </a:solidFill>
-                <a:latin typeface="JetBrains Mono"/>
-                <a:ea typeface="JetBrains Mono"/>
-                <a:cs typeface="JetBrains Mono"/>
-              </a:rPr>
-              <a:t>"Accepted"</a:t>
-            </a:r>
-            <a:r>
-              <a:rPr sz="2400" b="0">
-                <a:solidFill>
-                  <a:srgbClr val="080808"/>
-                </a:solidFill>
-                <a:latin typeface="Calibri"/>
-                <a:ea typeface="Calibri"/>
-                <a:cs typeface="Calibri"/>
-              </a:rPr>
-              <a:t> when the normalised response equals </a:t>
-            </a:r>
-            <a:r>
-              <a:rPr sz="2400" b="0">
-                <a:solidFill>
-                  <a:srgbClr val="067D17"/>
-                </a:solidFill>
-                <a:latin typeface="JetBrains Mono"/>
-                <a:ea typeface="JetBrains Mono"/>
-                <a:cs typeface="JetBrains Mono"/>
-              </a:rPr>
-              <a:t>"yes"</a:t>
-            </a:r>
-            <a:r>
-              <a:rPr sz="2400" b="0">
-                <a:solidFill>
-                  <a:srgbClr val="080808"/>
-                </a:solidFill>
-                <a:latin typeface="Calibri"/>
-                <a:ea typeface="Calibri"/>
-                <a:cs typeface="Calibri"/>
-              </a:rPr>
-              <a:t> and </a:t>
-            </a:r>
-            <a:r>
-              <a:rPr sz="2400" b="0">
-                <a:solidFill>
-                  <a:srgbClr val="067D17"/>
-                </a:solidFill>
-                <a:latin typeface="JetBrains Mono"/>
-                <a:ea typeface="JetBrains Mono"/>
-                <a:cs typeface="JetBrains Mono"/>
-              </a:rPr>
-              <a:t>"Not accepted"</a:t>
-            </a:r>
-            <a:r>
-              <a:rPr sz="2400" b="0">
-                <a:solidFill>
-                  <a:srgbClr val="080808"/>
-                </a:solidFill>
-                <a:latin typeface="Calibri"/>
-                <a:ea typeface="Calibri"/>
-                <a:cs typeface="Calibri"/>
-              </a:rPr>
-              <a:t> otherwise.</a:t>
+              <a:t>. Display Accepted when the normalised response equals yes and Not accepted otherwise.</a:t>
             </a:r>
           </a:p>
         </p:txBody>

--- a/Mapped Curriculum Lessons/Grade 7/Lesson 14 - Changing Text Case/Changing Text Case - Slides.pptx
+++ b/Mapped Curriculum Lessons/Grade 7/Lesson 14 - Changing Text Case/Changing Text Case - Slides.pptx
@@ -2,28 +2,28 @@
 <file path=ppt/presentation.xml><?xml version="1.0" encoding="utf-8"?>
 <p:presentation xmlns:p="http://schemas.openxmlformats.org/presentationml/2006/main" embedTrueTypeFonts="1" saveSubsetFonts="0">
   <p:sldMasterIdLst>
-    <p:sldMasterId xmlns:r="http://schemas.openxmlformats.org/officeDocument/2006/relationships" id="2147483648" r:id="R7bd5e0f7b482491f"/>
+    <p:sldMasterId xmlns:r="http://schemas.openxmlformats.org/officeDocument/2006/relationships" id="2147483648" r:id="Rb3017f1604b5459f"/>
   </p:sldMasterIdLst>
   <p:notesMasterIdLst>
-    <p:notesMasterId xmlns:r="http://schemas.openxmlformats.org/officeDocument/2006/relationships" r:id="R8dcc887f03224646"/>
+    <p:notesMasterId xmlns:r="http://schemas.openxmlformats.org/officeDocument/2006/relationships" r:id="R647ad1aee5e34e0a"/>
   </p:notesMasterIdLst>
   <p:sldIdLst>
-    <p:sldId xmlns:r="http://schemas.openxmlformats.org/officeDocument/2006/relationships" id="256" r:id="Rc22dce0641354f5a"/>
-    <p:sldId xmlns:r="http://schemas.openxmlformats.org/officeDocument/2006/relationships" id="257" r:id="R27ebfbc10289410e"/>
-    <p:sldId xmlns:r="http://schemas.openxmlformats.org/officeDocument/2006/relationships" id="258" r:id="Rc8d33e70e995421c"/>
-    <p:sldId xmlns:r="http://schemas.openxmlformats.org/officeDocument/2006/relationships" id="259" r:id="R3764a69c1bef4e22"/>
-    <p:sldId xmlns:r="http://schemas.openxmlformats.org/officeDocument/2006/relationships" id="260" r:id="Rc8837b023b5b492a"/>
-    <p:sldId xmlns:r="http://schemas.openxmlformats.org/officeDocument/2006/relationships" id="261" r:id="Rf1e21f3934ad4baf"/>
-    <p:sldId xmlns:r="http://schemas.openxmlformats.org/officeDocument/2006/relationships" id="262" r:id="R390258e6bce04f4e"/>
-    <p:sldId xmlns:r="http://schemas.openxmlformats.org/officeDocument/2006/relationships" id="263" r:id="R4daa3d364bf64b24"/>
-    <p:sldId xmlns:r="http://schemas.openxmlformats.org/officeDocument/2006/relationships" id="264" r:id="Rb63e75c57490469d"/>
+    <p:sldId xmlns:r="http://schemas.openxmlformats.org/officeDocument/2006/relationships" id="256" r:id="Rdd4b1b08a2744f59"/>
+    <p:sldId xmlns:r="http://schemas.openxmlformats.org/officeDocument/2006/relationships" id="257" r:id="Rdbf07293943543e0"/>
+    <p:sldId xmlns:r="http://schemas.openxmlformats.org/officeDocument/2006/relationships" id="258" r:id="Rce42549a4c44487b"/>
+    <p:sldId xmlns:r="http://schemas.openxmlformats.org/officeDocument/2006/relationships" id="259" r:id="Rdb2385a7464940d7"/>
+    <p:sldId xmlns:r="http://schemas.openxmlformats.org/officeDocument/2006/relationships" id="260" r:id="R60b823fae2bf4925"/>
+    <p:sldId xmlns:r="http://schemas.openxmlformats.org/officeDocument/2006/relationships" id="261" r:id="Rfefc06d0b76648dc"/>
+    <p:sldId xmlns:r="http://schemas.openxmlformats.org/officeDocument/2006/relationships" id="262" r:id="Ra0751ec6dfe64adf"/>
+    <p:sldId xmlns:r="http://schemas.openxmlformats.org/officeDocument/2006/relationships" id="263" r:id="Rfe18c22f47bd48d4"/>
+    <p:sldId xmlns:r="http://schemas.openxmlformats.org/officeDocument/2006/relationships" id="264" r:id="R72967f5475f74a77"/>
   </p:sldIdLst>
   <p:sldSz cx="12192000" cy="6858000"/>
   <p:notesSz cx="6858000" cy="9144000"/>
   <p:embeddedFontLst>
     <p:embeddedFont>
       <p:font typeface="JetBrains Mono"/>
-      <p:regular xmlns:r="http://schemas.openxmlformats.org/officeDocument/2006/relationships" r:id="Ra5473a9f81ed4a56"/>
+      <p:regular xmlns:r="http://schemas.openxmlformats.org/officeDocument/2006/relationships" r:id="R24a93213a82a4374"/>
     </p:embeddedFont>
   </p:embeddedFontLst>
 </p:presentation>
@@ -1071,7 +1071,7 @@
           <p:nvPr/>
         </p:nvPicPr>
         <p:blipFill rotWithShape="1">
-          <a:blip xmlns:r="http://schemas.openxmlformats.org/officeDocument/2006/relationships" xmlns:a="http://schemas.openxmlformats.org/drawingml/2006/main" r:embed="R77c2490e64e84f56"/>
+          <a:blip xmlns:r="http://schemas.openxmlformats.org/officeDocument/2006/relationships" xmlns:a="http://schemas.openxmlformats.org/drawingml/2006/main" r:embed="Raadc9cbd38f7459c"/>
           <a:stretch xmlns:a="http://schemas.openxmlformats.org/drawingml/2006/main"/>
         </p:blipFill>
         <p:spPr>
@@ -1451,7 +1451,7 @@
           <p:nvPr/>
         </p:nvPicPr>
         <p:blipFill rotWithShape="1">
-          <a:blip xmlns:r="http://schemas.openxmlformats.org/officeDocument/2006/relationships" xmlns:a="http://schemas.openxmlformats.org/drawingml/2006/main" r:embed="Rfe194579659a4194">
+          <a:blip xmlns:r="http://schemas.openxmlformats.org/officeDocument/2006/relationships" xmlns:a="http://schemas.openxmlformats.org/drawingml/2006/main" r:embed="R0089544202ca4aac">
             <a:alphaModFix amt="28000"/>
           </a:blip>
           <a:stretch xmlns:a="http://schemas.openxmlformats.org/drawingml/2006/main"/>
@@ -1664,7 +1664,7 @@
           <p:nvPr/>
         </p:nvPicPr>
         <p:blipFill rotWithShape="1">
-          <a:blip xmlns:r="http://schemas.openxmlformats.org/officeDocument/2006/relationships" xmlns:a="http://schemas.openxmlformats.org/drawingml/2006/main" r:embed="R6f8d99fe58c343fc">
+          <a:blip xmlns:r="http://schemas.openxmlformats.org/officeDocument/2006/relationships" xmlns:a="http://schemas.openxmlformats.org/drawingml/2006/main" r:embed="Rd9f333960b8c4a06">
             <a:alphaModFix amt="28000"/>
           </a:blip>
           <a:stretch xmlns:a="http://schemas.openxmlformats.org/drawingml/2006/main"/>
@@ -1899,7 +1899,7 @@
           <p:nvPr/>
         </p:nvPicPr>
         <p:blipFill rotWithShape="1">
-          <a:blip xmlns:r="http://schemas.openxmlformats.org/officeDocument/2006/relationships" xmlns:a="http://schemas.openxmlformats.org/drawingml/2006/main" r:embed="Rac4220b7a5cd4236">
+          <a:blip xmlns:r="http://schemas.openxmlformats.org/officeDocument/2006/relationships" xmlns:a="http://schemas.openxmlformats.org/drawingml/2006/main" r:embed="R07be3e3a663e4c80">
             <a:alphaModFix amt="28000"/>
           </a:blip>
           <a:stretch xmlns:a="http://schemas.openxmlformats.org/drawingml/2006/main"/>
@@ -2176,7 +2176,7 @@
           <p:nvPr/>
         </p:nvPicPr>
         <p:blipFill rotWithShape="1">
-          <a:blip xmlns:r="http://schemas.openxmlformats.org/officeDocument/2006/relationships" xmlns:a="http://schemas.openxmlformats.org/drawingml/2006/main" r:embed="Rd23b470a69c8417a">
+          <a:blip xmlns:r="http://schemas.openxmlformats.org/officeDocument/2006/relationships" xmlns:a="http://schemas.openxmlformats.org/drawingml/2006/main" r:embed="R5f60ae3694ab4132">
             <a:alphaModFix amt="28000"/>
           </a:blip>
           <a:stretch xmlns:a="http://schemas.openxmlformats.org/drawingml/2006/main"/>
@@ -2451,7 +2451,7 @@
           <p:nvPr/>
         </p:nvPicPr>
         <p:blipFill rotWithShape="1">
-          <a:blip xmlns:r="http://schemas.openxmlformats.org/officeDocument/2006/relationships" xmlns:a="http://schemas.openxmlformats.org/drawingml/2006/main" r:embed="R8070e441ecc941d4">
+          <a:blip xmlns:r="http://schemas.openxmlformats.org/officeDocument/2006/relationships" xmlns:a="http://schemas.openxmlformats.org/drawingml/2006/main" r:embed="R51a70e0de9e04044">
             <a:alphaModFix amt="28000"/>
           </a:blip>
           <a:stretch xmlns:a="http://schemas.openxmlformats.org/drawingml/2006/main"/>
@@ -2875,7 +2875,7 @@
           <p:nvPr/>
         </p:nvPicPr>
         <p:blipFill rotWithShape="1">
-          <a:blip xmlns:r="http://schemas.openxmlformats.org/officeDocument/2006/relationships" xmlns:a="http://schemas.openxmlformats.org/drawingml/2006/main" r:embed="Rea05f77cfdcd4777">
+          <a:blip xmlns:r="http://schemas.openxmlformats.org/officeDocument/2006/relationships" xmlns:a="http://schemas.openxmlformats.org/drawingml/2006/main" r:embed="R72695473de1442a5">
             <a:alphaModFix amt="28000"/>
           </a:blip>
           <a:stretch xmlns:a="http://schemas.openxmlformats.org/drawingml/2006/main"/>
@@ -3016,7 +3016,7 @@
           <p:nvPr/>
         </p:nvPicPr>
         <p:blipFill rotWithShape="1">
-          <a:blip xmlns:r="http://schemas.openxmlformats.org/officeDocument/2006/relationships" xmlns:a="http://schemas.openxmlformats.org/drawingml/2006/main" r:embed="R2bd4a238c6f1407c">
+          <a:blip xmlns:r="http://schemas.openxmlformats.org/officeDocument/2006/relationships" xmlns:a="http://schemas.openxmlformats.org/drawingml/2006/main" r:embed="R42164795b77a4d69">
             <a:alphaModFix amt="28000"/>
           </a:blip>
           <a:stretch xmlns:a="http://schemas.openxmlformats.org/drawingml/2006/main"/>
@@ -3130,7 +3130,7 @@
           <p:nvPr/>
         </p:nvPicPr>
         <p:blipFill rotWithShape="1">
-          <a:blip xmlns:r="http://schemas.openxmlformats.org/officeDocument/2006/relationships" xmlns:a="http://schemas.openxmlformats.org/drawingml/2006/main" r:embed="R20cbad09df8845d8">
+          <a:blip xmlns:r="http://schemas.openxmlformats.org/officeDocument/2006/relationships" xmlns:a="http://schemas.openxmlformats.org/drawingml/2006/main" r:embed="R9f158eb4639d4597">
             <a:alphaModFix amt="28000"/>
           </a:blip>
           <a:stretch xmlns:a="http://schemas.openxmlformats.org/drawingml/2006/main"/>
@@ -3457,7 +3457,7 @@
           <p:nvPr/>
         </p:nvPicPr>
         <p:blipFill rotWithShape="1">
-          <a:blip xmlns:r="http://schemas.openxmlformats.org/officeDocument/2006/relationships" xmlns:a="http://schemas.openxmlformats.org/drawingml/2006/main" r:embed="R2c1ac3aec55f4d99">
+          <a:blip xmlns:r="http://schemas.openxmlformats.org/officeDocument/2006/relationships" xmlns:a="http://schemas.openxmlformats.org/drawingml/2006/main" r:embed="R6ec6be7072be4856">
             <a:alphaModFix amt="28000"/>
           </a:blip>
           <a:stretch xmlns:a="http://schemas.openxmlformats.org/drawingml/2006/main"/>
@@ -3745,7 +3745,7 @@
           <p:nvPr/>
         </p:nvPicPr>
         <p:blipFill rotWithShape="1">
-          <a:blip xmlns:r="http://schemas.openxmlformats.org/officeDocument/2006/relationships" xmlns:a="http://schemas.openxmlformats.org/drawingml/2006/main" r:embed="Rde2274594cf043ac">
+          <a:blip xmlns:r="http://schemas.openxmlformats.org/officeDocument/2006/relationships" xmlns:a="http://schemas.openxmlformats.org/drawingml/2006/main" r:embed="R35ce2bfc04114d47">
             <a:alphaModFix amt="28000"/>
           </a:blip>
           <a:stretch xmlns:a="http://schemas.openxmlformats.org/drawingml/2006/main"/>
@@ -3982,17 +3982,17 @@
   </p:cSld>
   <p:clrMap bg1="lt1" tx1="dk1" bg2="lt2" tx2="dk2" accent1="accent1" accent2="accent2" accent3="accent3" accent4="accent4" accent5="accent5" accent6="accent6" hlink="hlink" folHlink="folHlink"/>
   <p:sldLayoutIdLst>
-    <p:sldLayoutId xmlns:r="http://schemas.openxmlformats.org/officeDocument/2006/relationships" id="2147483649" r:id="R8ab085faccb94c69"/>
-    <p:sldLayoutId xmlns:r="http://schemas.openxmlformats.org/officeDocument/2006/relationships" id="2147483650" r:id="R8ca5d93300614db2"/>
-    <p:sldLayoutId xmlns:r="http://schemas.openxmlformats.org/officeDocument/2006/relationships" id="2147483651" r:id="Ra127be8c10944df8"/>
-    <p:sldLayoutId xmlns:r="http://schemas.openxmlformats.org/officeDocument/2006/relationships" id="2147483652" r:id="Rdaff235385204041"/>
-    <p:sldLayoutId xmlns:r="http://schemas.openxmlformats.org/officeDocument/2006/relationships" id="2147483653" r:id="Rb695ca1a2b6d40db"/>
-    <p:sldLayoutId xmlns:r="http://schemas.openxmlformats.org/officeDocument/2006/relationships" id="2147483654" r:id="R1b2681a5695c49f4"/>
-    <p:sldLayoutId xmlns:r="http://schemas.openxmlformats.org/officeDocument/2006/relationships" id="2147483655" r:id="Rc5f70240886c4dd5"/>
-    <p:sldLayoutId xmlns:r="http://schemas.openxmlformats.org/officeDocument/2006/relationships" id="2147483656" r:id="R37e9fff1e2574c58"/>
-    <p:sldLayoutId xmlns:r="http://schemas.openxmlformats.org/officeDocument/2006/relationships" id="2147483657" r:id="Ref3ef6f8881745ce"/>
-    <p:sldLayoutId xmlns:r="http://schemas.openxmlformats.org/officeDocument/2006/relationships" id="2147483658" r:id="R6e95e2e00dfd46b3"/>
-    <p:sldLayoutId xmlns:r="http://schemas.openxmlformats.org/officeDocument/2006/relationships" id="2147483659" r:id="R892f81504200451a"/>
+    <p:sldLayoutId xmlns:r="http://schemas.openxmlformats.org/officeDocument/2006/relationships" id="2147483649" r:id="R9871943a74f74471"/>
+    <p:sldLayoutId xmlns:r="http://schemas.openxmlformats.org/officeDocument/2006/relationships" id="2147483650" r:id="R753fdd8b6b0541b8"/>
+    <p:sldLayoutId xmlns:r="http://schemas.openxmlformats.org/officeDocument/2006/relationships" id="2147483651" r:id="R145eb6b6878347ab"/>
+    <p:sldLayoutId xmlns:r="http://schemas.openxmlformats.org/officeDocument/2006/relationships" id="2147483652" r:id="R5d594b4024204643"/>
+    <p:sldLayoutId xmlns:r="http://schemas.openxmlformats.org/officeDocument/2006/relationships" id="2147483653" r:id="R31fae7bf5a7c48e0"/>
+    <p:sldLayoutId xmlns:r="http://schemas.openxmlformats.org/officeDocument/2006/relationships" id="2147483654" r:id="Rf90d06bb267646f6"/>
+    <p:sldLayoutId xmlns:r="http://schemas.openxmlformats.org/officeDocument/2006/relationships" id="2147483655" r:id="R5dcf5394c87d43ad"/>
+    <p:sldLayoutId xmlns:r="http://schemas.openxmlformats.org/officeDocument/2006/relationships" id="2147483656" r:id="R884239ccb12844bb"/>
+    <p:sldLayoutId xmlns:r="http://schemas.openxmlformats.org/officeDocument/2006/relationships" id="2147483657" r:id="Rc8a1e1a318a845d7"/>
+    <p:sldLayoutId xmlns:r="http://schemas.openxmlformats.org/officeDocument/2006/relationships" id="2147483658" r:id="R0822b044565641e4"/>
+    <p:sldLayoutId xmlns:r="http://schemas.openxmlformats.org/officeDocument/2006/relationships" id="2147483659" r:id="Rc3cda07b97214fd7"/>
   </p:sldLayoutIdLst>
   <p:hf hdr="0" ftr="0" dt="0"/>
   <p:txStyles>
@@ -7153,7 +7153,95 @@
                 <a:ea typeface="Calibri"/>
                 <a:cs typeface="Calibri"/>
               </a:rPr>
-              <a:t>Make the displayed team name uppercase and the displayed code lowercase. Falcons and f7 should become FALCONS and f7.</a:t>
+              <a:t>Change the program so [team] is displayed in upper case and [code] is displayed in lower case. Test </a:t>
+            </a:r>
+            <a:r>
+              <a:rPr sz="2400" b="0">
+                <a:solidFill>
+                  <a:srgbClr val="067D17"/>
+                </a:solidFill>
+                <a:latin typeface="JetBrains Mono"/>
+                <a:ea typeface="JetBrains Mono"/>
+                <a:cs typeface="JetBrains Mono"/>
+              </a:rPr>
+              <a:t>"Falcons"</a:t>
+            </a:r>
+            <a:r>
+              <a:rPr sz="2400" b="0">
+                <a:solidFill>
+                  <a:srgbClr val="080808"/>
+                </a:solidFill>
+                <a:latin typeface="Calibri"/>
+                <a:ea typeface="Calibri"/>
+                <a:cs typeface="Calibri"/>
+              </a:rPr>
+              <a:t> and </a:t>
+            </a:r>
+            <a:r>
+              <a:rPr sz="2400" b="0">
+                <a:solidFill>
+                  <a:srgbClr val="067D17"/>
+                </a:solidFill>
+                <a:latin typeface="JetBrains Mono"/>
+                <a:ea typeface="JetBrains Mono"/>
+                <a:cs typeface="JetBrains Mono"/>
+              </a:rPr>
+              <a:t>"F7"</a:t>
+            </a:r>
+            <a:r>
+              <a:rPr sz="2400" b="0">
+                <a:solidFill>
+                  <a:srgbClr val="080808"/>
+                </a:solidFill>
+                <a:latin typeface="Calibri"/>
+                <a:ea typeface="Calibri"/>
+                <a:cs typeface="Calibri"/>
+              </a:rPr>
+              <a:t>; display </a:t>
+            </a:r>
+            <a:r>
+              <a:rPr sz="2400" b="0">
+                <a:solidFill>
+                  <a:srgbClr val="067D17"/>
+                </a:solidFill>
+                <a:latin typeface="JetBrains Mono"/>
+                <a:ea typeface="JetBrains Mono"/>
+                <a:cs typeface="JetBrains Mono"/>
+              </a:rPr>
+              <a:t>"Team: FALCONS"</a:t>
+            </a:r>
+            <a:r>
+              <a:rPr sz="2400" b="0">
+                <a:solidFill>
+                  <a:srgbClr val="080808"/>
+                </a:solidFill>
+                <a:latin typeface="Calibri"/>
+                <a:ea typeface="Calibri"/>
+                <a:cs typeface="Calibri"/>
+              </a:rPr>
+              <a:t> and </a:t>
+            </a:r>
+            <a:r>
+              <a:rPr sz="2400" b="0">
+                <a:solidFill>
+                  <a:srgbClr val="067D17"/>
+                </a:solidFill>
+                <a:latin typeface="JetBrains Mono"/>
+                <a:ea typeface="JetBrains Mono"/>
+                <a:cs typeface="JetBrains Mono"/>
+              </a:rPr>
+              <a:t>"Code: f7"</a:t>
+            </a:r>
+            <a:r>
+              <a:rPr sz="2400" b="0">
+                <a:solidFill>
+                  <a:srgbClr val="080808"/>
+                </a:solidFill>
+                <a:latin typeface="Calibri"/>
+                <a:ea typeface="Calibri"/>
+                <a:cs typeface="Calibri"/>
+              </a:rPr>
+              <a:t>.</a:t>
             </a:r>
           </a:p>
         </p:txBody>
@@ -7798,18 +7886,18 @@
                 <a:ea typeface="Calibri"/>
                 <a:cs typeface="Calibri"/>
               </a:rPr>
-              <a:t>Add a response input and store </a:t>
+              <a:t>Ask the user to enter </a:t>
             </a:r>
             <a:r>
               <a:rPr sz="2400" b="0">
                 <a:solidFill>
-                  <a:srgbClr val="1750EB"/>
-                </a:solidFill>
-                <a:latin typeface="JetBrains Mono"/>
-                <a:ea typeface="JetBrains Mono"/>
-                <a:cs typeface="JetBrains Mono"/>
-              </a:rPr>
-              <a:t>response.lower()</a:t>
+                  <a:srgbClr val="067D17"/>
+                </a:solidFill>
+                <a:latin typeface="JetBrains Mono"/>
+                <a:ea typeface="JetBrains Mono"/>
+                <a:cs typeface="JetBrains Mono"/>
+              </a:rPr>
+              <a:t>"yes"</a:t>
             </a:r>
             <a:r>
               <a:rPr sz="2400" b="0">
@@ -7820,7 +7908,183 @@
                 <a:ea typeface="Calibri"/>
                 <a:cs typeface="Calibri"/>
               </a:rPr>
-              <a:t>. Display Accepted when the normalised response equals yes and Not accepted otherwise.</a:t>
+              <a:t> or </a:t>
+            </a:r>
+            <a:r>
+              <a:rPr sz="2400" b="0">
+                <a:solidFill>
+                  <a:srgbClr val="067D17"/>
+                </a:solidFill>
+                <a:latin typeface="JetBrains Mono"/>
+                <a:ea typeface="JetBrains Mono"/>
+                <a:cs typeface="JetBrains Mono"/>
+              </a:rPr>
+              <a:t>"no"</a:t>
+            </a:r>
+            <a:r>
+              <a:rPr sz="2400" b="0">
+                <a:solidFill>
+                  <a:srgbClr val="080808"/>
+                </a:solidFill>
+                <a:latin typeface="Calibri"/>
+                <a:ea typeface="Calibri"/>
+                <a:cs typeface="Calibri"/>
+              </a:rPr>
+              <a:t> and store the answer in [response]. Store [response].</a:t>
+            </a:r>
+            <a:r>
+              <a:rPr sz="2400" b="0">
+                <a:solidFill>
+                  <a:srgbClr val="1750EB"/>
+                </a:solidFill>
+                <a:latin typeface="JetBrains Mono"/>
+                <a:ea typeface="JetBrains Mono"/>
+                <a:cs typeface="JetBrains Mono"/>
+              </a:rPr>
+              <a:t>lower()</a:t>
+            </a:r>
+            <a:r>
+              <a:rPr sz="2400" b="0">
+                <a:solidFill>
+                  <a:srgbClr val="080808"/>
+                </a:solidFill>
+                <a:latin typeface="Calibri"/>
+                <a:ea typeface="Calibri"/>
+                <a:cs typeface="Calibri"/>
+              </a:rPr>
+              <a:t> back in [response]. Use an </a:t>
+            </a:r>
+            <a:r>
+              <a:rPr sz="2400" b="0">
+                <a:solidFill>
+                  <a:srgbClr val="1750EB"/>
+                </a:solidFill>
+                <a:latin typeface="JetBrains Mono"/>
+                <a:ea typeface="JetBrains Mono"/>
+                <a:cs typeface="JetBrains Mono"/>
+              </a:rPr>
+              <a:t>if</a:t>
+            </a:r>
+            <a:r>
+              <a:rPr sz="2400" b="0">
+                <a:solidFill>
+                  <a:srgbClr val="080808"/>
+                </a:solidFill>
+                <a:latin typeface="Calibri"/>
+                <a:ea typeface="Calibri"/>
+                <a:cs typeface="Calibri"/>
+              </a:rPr>
+              <a:t> statement to check whether [response] equals </a:t>
+            </a:r>
+            <a:r>
+              <a:rPr sz="2400" b="0">
+                <a:solidFill>
+                  <a:srgbClr val="067D17"/>
+                </a:solidFill>
+                <a:latin typeface="JetBrains Mono"/>
+                <a:ea typeface="JetBrains Mono"/>
+                <a:cs typeface="JetBrains Mono"/>
+              </a:rPr>
+              <a:t>"yes"</a:t>
+            </a:r>
+            <a:r>
+              <a:rPr sz="2400" b="0">
+                <a:solidFill>
+                  <a:srgbClr val="080808"/>
+                </a:solidFill>
+                <a:latin typeface="Calibri"/>
+                <a:ea typeface="Calibri"/>
+                <a:cs typeface="Calibri"/>
+              </a:rPr>
+              <a:t>. Display </a:t>
+            </a:r>
+            <a:r>
+              <a:rPr sz="2400" b="0">
+                <a:solidFill>
+                  <a:srgbClr val="067D17"/>
+                </a:solidFill>
+                <a:latin typeface="JetBrains Mono"/>
+                <a:ea typeface="JetBrains Mono"/>
+                <a:cs typeface="JetBrains Mono"/>
+              </a:rPr>
+              <a:t>"Accepted"</a:t>
+            </a:r>
+            <a:r>
+              <a:rPr sz="2400" b="0">
+                <a:solidFill>
+                  <a:srgbClr val="080808"/>
+                </a:solidFill>
+                <a:latin typeface="Calibri"/>
+                <a:ea typeface="Calibri"/>
+                <a:cs typeface="Calibri"/>
+              </a:rPr>
+              <a:t> when it does; otherwise display </a:t>
+            </a:r>
+            <a:r>
+              <a:rPr sz="2400" b="0">
+                <a:solidFill>
+                  <a:srgbClr val="067D17"/>
+                </a:solidFill>
+                <a:latin typeface="JetBrains Mono"/>
+                <a:ea typeface="JetBrains Mono"/>
+                <a:cs typeface="JetBrains Mono"/>
+              </a:rPr>
+              <a:t>"Not accepted"</a:t>
+            </a:r>
+            <a:r>
+              <a:rPr sz="2400" b="0">
+                <a:solidFill>
+                  <a:srgbClr val="080808"/>
+                </a:solidFill>
+                <a:latin typeface="Calibri"/>
+                <a:ea typeface="Calibri"/>
+                <a:cs typeface="Calibri"/>
+              </a:rPr>
+              <a:t>. Test </a:t>
+            </a:r>
+            <a:r>
+              <a:rPr sz="2400" b="0">
+                <a:solidFill>
+                  <a:srgbClr val="067D17"/>
+                </a:solidFill>
+                <a:latin typeface="JetBrains Mono"/>
+                <a:ea typeface="JetBrains Mono"/>
+                <a:cs typeface="JetBrains Mono"/>
+              </a:rPr>
+              <a:t>"YES"</a:t>
+            </a:r>
+            <a:r>
+              <a:rPr sz="2400" b="0">
+                <a:solidFill>
+                  <a:srgbClr val="080808"/>
+                </a:solidFill>
+                <a:latin typeface="Calibri"/>
+                <a:ea typeface="Calibri"/>
+                <a:cs typeface="Calibri"/>
+              </a:rPr>
+              <a:t> and </a:t>
+            </a:r>
+            <a:r>
+              <a:rPr sz="2400" b="0">
+                <a:solidFill>
+                  <a:srgbClr val="067D17"/>
+                </a:solidFill>
+                <a:latin typeface="JetBrains Mono"/>
+                <a:ea typeface="JetBrains Mono"/>
+                <a:cs typeface="JetBrains Mono"/>
+              </a:rPr>
+              <a:t>"no"</a:t>
+            </a:r>
+            <a:r>
+              <a:rPr sz="2400" b="0">
+                <a:solidFill>
+                  <a:srgbClr val="080808"/>
+                </a:solidFill>
+                <a:latin typeface="Calibri"/>
+                <a:ea typeface="Calibri"/>
+                <a:cs typeface="Calibri"/>
+              </a:rPr>
+              <a:t>.</a:t>
             </a:r>
           </a:p>
         </p:txBody>
@@ -8465,7 +8729,117 @@
                 <a:ea typeface="Calibri"/>
                 <a:cs typeface="Calibri"/>
               </a:rPr>
-              <a:t>Build a badge formatter. Ask for a first name and a two-letter group code; display the name in lower case and the group code in upper case on separate labelled lines.</a:t>
+              <a:t>Ask for a first name and store it in [name]. Ask for a two-letter group code, such as </a:t>
+            </a:r>
+            <a:r>
+              <a:rPr sz="2400" b="0">
+                <a:solidFill>
+                  <a:srgbClr val="067D17"/>
+                </a:solidFill>
+                <a:latin typeface="JetBrains Mono"/>
+                <a:ea typeface="JetBrains Mono"/>
+                <a:cs typeface="JetBrains Mono"/>
+              </a:rPr>
+              <a:t>"ab"</a:t>
+            </a:r>
+            <a:r>
+              <a:rPr sz="2400" b="0">
+                <a:solidFill>
+                  <a:srgbClr val="080808"/>
+                </a:solidFill>
+                <a:latin typeface="Calibri"/>
+                <a:ea typeface="Calibri"/>
+                <a:cs typeface="Calibri"/>
+              </a:rPr>
+              <a:t>, and store it in [group]. Display [name] in lower case and [group] in upper case on separate labelled lines. Test </a:t>
+            </a:r>
+            <a:r>
+              <a:rPr sz="2400" b="0">
+                <a:solidFill>
+                  <a:srgbClr val="067D17"/>
+                </a:solidFill>
+                <a:latin typeface="JetBrains Mono"/>
+                <a:ea typeface="JetBrains Mono"/>
+                <a:cs typeface="JetBrains Mono"/>
+              </a:rPr>
+              <a:t>"Ava"</a:t>
+            </a:r>
+            <a:r>
+              <a:rPr sz="2400" b="0">
+                <a:solidFill>
+                  <a:srgbClr val="080808"/>
+                </a:solidFill>
+                <a:latin typeface="Calibri"/>
+                <a:ea typeface="Calibri"/>
+                <a:cs typeface="Calibri"/>
+              </a:rPr>
+              <a:t> and </a:t>
+            </a:r>
+            <a:r>
+              <a:rPr sz="2400" b="0">
+                <a:solidFill>
+                  <a:srgbClr val="067D17"/>
+                </a:solidFill>
+                <a:latin typeface="JetBrains Mono"/>
+                <a:ea typeface="JetBrains Mono"/>
+                <a:cs typeface="JetBrains Mono"/>
+              </a:rPr>
+              <a:t>"ab"</a:t>
+            </a:r>
+            <a:r>
+              <a:rPr sz="2400" b="0">
+                <a:solidFill>
+                  <a:srgbClr val="080808"/>
+                </a:solidFill>
+                <a:latin typeface="Calibri"/>
+                <a:ea typeface="Calibri"/>
+                <a:cs typeface="Calibri"/>
+              </a:rPr>
+              <a:t>; display </a:t>
+            </a:r>
+            <a:r>
+              <a:rPr sz="2400" b="0">
+                <a:solidFill>
+                  <a:srgbClr val="067D17"/>
+                </a:solidFill>
+                <a:latin typeface="JetBrains Mono"/>
+                <a:ea typeface="JetBrains Mono"/>
+                <a:cs typeface="JetBrains Mono"/>
+              </a:rPr>
+              <a:t>"Account name: ava"</a:t>
+            </a:r>
+            <a:r>
+              <a:rPr sz="2400" b="0">
+                <a:solidFill>
+                  <a:srgbClr val="080808"/>
+                </a:solidFill>
+                <a:latin typeface="Calibri"/>
+                <a:ea typeface="Calibri"/>
+                <a:cs typeface="Calibri"/>
+              </a:rPr>
+              <a:t> and </a:t>
+            </a:r>
+            <a:r>
+              <a:rPr sz="2400" b="0">
+                <a:solidFill>
+                  <a:srgbClr val="067D17"/>
+                </a:solidFill>
+                <a:latin typeface="JetBrains Mono"/>
+                <a:ea typeface="JetBrains Mono"/>
+                <a:cs typeface="JetBrains Mono"/>
+              </a:rPr>
+              <a:t>"Group code: AB"</a:t>
+            </a:r>
+            <a:r>
+              <a:rPr sz="2400" b="0">
+                <a:solidFill>
+                  <a:srgbClr val="080808"/>
+                </a:solidFill>
+                <a:latin typeface="Calibri"/>
+                <a:ea typeface="Calibri"/>
+                <a:cs typeface="Calibri"/>
+              </a:rPr>
+              <a:t>.</a:t>
             </a:r>
           </a:p>
         </p:txBody>

--- a/Mapped Curriculum Lessons/Grade 7/Lesson 14 - Changing Text Case/Changing Text Case - Slides.pptx
+++ b/Mapped Curriculum Lessons/Grade 7/Lesson 14 - Changing Text Case/Changing Text Case - Slides.pptx
@@ -2,28 +2,28 @@
 <file path=ppt/presentation.xml><?xml version="1.0" encoding="utf-8"?>
 <p:presentation xmlns:p="http://schemas.openxmlformats.org/presentationml/2006/main" embedTrueTypeFonts="1" saveSubsetFonts="0">
   <p:sldMasterIdLst>
-    <p:sldMasterId xmlns:r="http://schemas.openxmlformats.org/officeDocument/2006/relationships" id="2147483648" r:id="Rb3017f1604b5459f"/>
+    <p:sldMasterId xmlns:r="http://schemas.openxmlformats.org/officeDocument/2006/relationships" id="2147483648" r:id="R95768b7283fc4fcc"/>
   </p:sldMasterIdLst>
   <p:notesMasterIdLst>
-    <p:notesMasterId xmlns:r="http://schemas.openxmlformats.org/officeDocument/2006/relationships" r:id="R647ad1aee5e34e0a"/>
+    <p:notesMasterId xmlns:r="http://schemas.openxmlformats.org/officeDocument/2006/relationships" r:id="Rc8b2e7124e394bb2"/>
   </p:notesMasterIdLst>
   <p:sldIdLst>
-    <p:sldId xmlns:r="http://schemas.openxmlformats.org/officeDocument/2006/relationships" id="256" r:id="Rdd4b1b08a2744f59"/>
-    <p:sldId xmlns:r="http://schemas.openxmlformats.org/officeDocument/2006/relationships" id="257" r:id="Rdbf07293943543e0"/>
-    <p:sldId xmlns:r="http://schemas.openxmlformats.org/officeDocument/2006/relationships" id="258" r:id="Rce42549a4c44487b"/>
-    <p:sldId xmlns:r="http://schemas.openxmlformats.org/officeDocument/2006/relationships" id="259" r:id="Rdb2385a7464940d7"/>
-    <p:sldId xmlns:r="http://schemas.openxmlformats.org/officeDocument/2006/relationships" id="260" r:id="R60b823fae2bf4925"/>
-    <p:sldId xmlns:r="http://schemas.openxmlformats.org/officeDocument/2006/relationships" id="261" r:id="Rfefc06d0b76648dc"/>
-    <p:sldId xmlns:r="http://schemas.openxmlformats.org/officeDocument/2006/relationships" id="262" r:id="Ra0751ec6dfe64adf"/>
-    <p:sldId xmlns:r="http://schemas.openxmlformats.org/officeDocument/2006/relationships" id="263" r:id="Rfe18c22f47bd48d4"/>
-    <p:sldId xmlns:r="http://schemas.openxmlformats.org/officeDocument/2006/relationships" id="264" r:id="R72967f5475f74a77"/>
+    <p:sldId xmlns:r="http://schemas.openxmlformats.org/officeDocument/2006/relationships" id="256" r:id="R9d94478a06004b09"/>
+    <p:sldId xmlns:r="http://schemas.openxmlformats.org/officeDocument/2006/relationships" id="257" r:id="R118b87c13c2841a2"/>
+    <p:sldId xmlns:r="http://schemas.openxmlformats.org/officeDocument/2006/relationships" id="258" r:id="Reb99fb865cca44d1"/>
+    <p:sldId xmlns:r="http://schemas.openxmlformats.org/officeDocument/2006/relationships" id="259" r:id="R643b064850324de3"/>
+    <p:sldId xmlns:r="http://schemas.openxmlformats.org/officeDocument/2006/relationships" id="260" r:id="R38d174ff429f4db4"/>
+    <p:sldId xmlns:r="http://schemas.openxmlformats.org/officeDocument/2006/relationships" id="261" r:id="R7029ea7b78244dad"/>
+    <p:sldId xmlns:r="http://schemas.openxmlformats.org/officeDocument/2006/relationships" id="262" r:id="Racb72bf2e0d149e5"/>
+    <p:sldId xmlns:r="http://schemas.openxmlformats.org/officeDocument/2006/relationships" id="263" r:id="Rd2e29b99340a47cc"/>
+    <p:sldId xmlns:r="http://schemas.openxmlformats.org/officeDocument/2006/relationships" id="264" r:id="R8d2cc31dcd5c424e"/>
   </p:sldIdLst>
   <p:sldSz cx="12192000" cy="6858000"/>
   <p:notesSz cx="6858000" cy="9144000"/>
   <p:embeddedFontLst>
     <p:embeddedFont>
       <p:font typeface="JetBrains Mono"/>
-      <p:regular xmlns:r="http://schemas.openxmlformats.org/officeDocument/2006/relationships" r:id="R24a93213a82a4374"/>
+      <p:regular xmlns:r="http://schemas.openxmlformats.org/officeDocument/2006/relationships" r:id="R5547da640d734307"/>
     </p:embeddedFont>
   </p:embeddedFontLst>
 </p:presentation>
@@ -1071,7 +1071,7 @@
           <p:nvPr/>
         </p:nvPicPr>
         <p:blipFill rotWithShape="1">
-          <a:blip xmlns:r="http://schemas.openxmlformats.org/officeDocument/2006/relationships" xmlns:a="http://schemas.openxmlformats.org/drawingml/2006/main" r:embed="Raadc9cbd38f7459c"/>
+          <a:blip xmlns:r="http://schemas.openxmlformats.org/officeDocument/2006/relationships" xmlns:a="http://schemas.openxmlformats.org/drawingml/2006/main" r:embed="Rab2989d1daba4024"/>
           <a:stretch xmlns:a="http://schemas.openxmlformats.org/drawingml/2006/main"/>
         </p:blipFill>
         <p:spPr>
@@ -1451,7 +1451,7 @@
           <p:nvPr/>
         </p:nvPicPr>
         <p:blipFill rotWithShape="1">
-          <a:blip xmlns:r="http://schemas.openxmlformats.org/officeDocument/2006/relationships" xmlns:a="http://schemas.openxmlformats.org/drawingml/2006/main" r:embed="R0089544202ca4aac">
+          <a:blip xmlns:r="http://schemas.openxmlformats.org/officeDocument/2006/relationships" xmlns:a="http://schemas.openxmlformats.org/drawingml/2006/main" r:embed="R8480d8592ad14e1e">
             <a:alphaModFix amt="28000"/>
           </a:blip>
           <a:stretch xmlns:a="http://schemas.openxmlformats.org/drawingml/2006/main"/>
@@ -1664,7 +1664,7 @@
           <p:nvPr/>
         </p:nvPicPr>
         <p:blipFill rotWithShape="1">
-          <a:blip xmlns:r="http://schemas.openxmlformats.org/officeDocument/2006/relationships" xmlns:a="http://schemas.openxmlformats.org/drawingml/2006/main" r:embed="Rd9f333960b8c4a06">
+          <a:blip xmlns:r="http://schemas.openxmlformats.org/officeDocument/2006/relationships" xmlns:a="http://schemas.openxmlformats.org/drawingml/2006/main" r:embed="Rb84932485f5c4ff4">
             <a:alphaModFix amt="28000"/>
           </a:blip>
           <a:stretch xmlns:a="http://schemas.openxmlformats.org/drawingml/2006/main"/>
@@ -1899,7 +1899,7 @@
           <p:nvPr/>
         </p:nvPicPr>
         <p:blipFill rotWithShape="1">
-          <a:blip xmlns:r="http://schemas.openxmlformats.org/officeDocument/2006/relationships" xmlns:a="http://schemas.openxmlformats.org/drawingml/2006/main" r:embed="R07be3e3a663e4c80">
+          <a:blip xmlns:r="http://schemas.openxmlformats.org/officeDocument/2006/relationships" xmlns:a="http://schemas.openxmlformats.org/drawingml/2006/main" r:embed="Rc63e1227de9a4557">
             <a:alphaModFix amt="28000"/>
           </a:blip>
           <a:stretch xmlns:a="http://schemas.openxmlformats.org/drawingml/2006/main"/>
@@ -2176,7 +2176,7 @@
           <p:nvPr/>
         </p:nvPicPr>
         <p:blipFill rotWithShape="1">
-          <a:blip xmlns:r="http://schemas.openxmlformats.org/officeDocument/2006/relationships" xmlns:a="http://schemas.openxmlformats.org/drawingml/2006/main" r:embed="R5f60ae3694ab4132">
+          <a:blip xmlns:r="http://schemas.openxmlformats.org/officeDocument/2006/relationships" xmlns:a="http://schemas.openxmlformats.org/drawingml/2006/main" r:embed="R517135f4401a41ab">
             <a:alphaModFix amt="28000"/>
           </a:blip>
           <a:stretch xmlns:a="http://schemas.openxmlformats.org/drawingml/2006/main"/>
@@ -2451,7 +2451,7 @@
           <p:nvPr/>
         </p:nvPicPr>
         <p:blipFill rotWithShape="1">
-          <a:blip xmlns:r="http://schemas.openxmlformats.org/officeDocument/2006/relationships" xmlns:a="http://schemas.openxmlformats.org/drawingml/2006/main" r:embed="R51a70e0de9e04044">
+          <a:blip xmlns:r="http://schemas.openxmlformats.org/officeDocument/2006/relationships" xmlns:a="http://schemas.openxmlformats.org/drawingml/2006/main" r:embed="R07430c843faa4234">
             <a:alphaModFix amt="28000"/>
           </a:blip>
           <a:stretch xmlns:a="http://schemas.openxmlformats.org/drawingml/2006/main"/>
@@ -2875,7 +2875,7 @@
           <p:nvPr/>
         </p:nvPicPr>
         <p:blipFill rotWithShape="1">
-          <a:blip xmlns:r="http://schemas.openxmlformats.org/officeDocument/2006/relationships" xmlns:a="http://schemas.openxmlformats.org/drawingml/2006/main" r:embed="R72695473de1442a5">
+          <a:blip xmlns:r="http://schemas.openxmlformats.org/officeDocument/2006/relationships" xmlns:a="http://schemas.openxmlformats.org/drawingml/2006/main" r:embed="R5891ffe17dfd4840">
             <a:alphaModFix amt="28000"/>
           </a:blip>
           <a:stretch xmlns:a="http://schemas.openxmlformats.org/drawingml/2006/main"/>
@@ -3016,7 +3016,7 @@
           <p:nvPr/>
         </p:nvPicPr>
         <p:blipFill rotWithShape="1">
-          <a:blip xmlns:r="http://schemas.openxmlformats.org/officeDocument/2006/relationships" xmlns:a="http://schemas.openxmlformats.org/drawingml/2006/main" r:embed="R42164795b77a4d69">
+          <a:blip xmlns:r="http://schemas.openxmlformats.org/officeDocument/2006/relationships" xmlns:a="http://schemas.openxmlformats.org/drawingml/2006/main" r:embed="R90396bfd18f74da5">
             <a:alphaModFix amt="28000"/>
           </a:blip>
           <a:stretch xmlns:a="http://schemas.openxmlformats.org/drawingml/2006/main"/>
@@ -3130,7 +3130,7 @@
           <p:nvPr/>
         </p:nvPicPr>
         <p:blipFill rotWithShape="1">
-          <a:blip xmlns:r="http://schemas.openxmlformats.org/officeDocument/2006/relationships" xmlns:a="http://schemas.openxmlformats.org/drawingml/2006/main" r:embed="R9f158eb4639d4597">
+          <a:blip xmlns:r="http://schemas.openxmlformats.org/officeDocument/2006/relationships" xmlns:a="http://schemas.openxmlformats.org/drawingml/2006/main" r:embed="Rb9bc75a5b11f4c1c">
             <a:alphaModFix amt="28000"/>
           </a:blip>
           <a:stretch xmlns:a="http://schemas.openxmlformats.org/drawingml/2006/main"/>
@@ -3457,7 +3457,7 @@
           <p:nvPr/>
         </p:nvPicPr>
         <p:blipFill rotWithShape="1">
-          <a:blip xmlns:r="http://schemas.openxmlformats.org/officeDocument/2006/relationships" xmlns:a="http://schemas.openxmlformats.org/drawingml/2006/main" r:embed="R6ec6be7072be4856">
+          <a:blip xmlns:r="http://schemas.openxmlformats.org/officeDocument/2006/relationships" xmlns:a="http://schemas.openxmlformats.org/drawingml/2006/main" r:embed="R26717c383f6a4ef5">
             <a:alphaModFix amt="28000"/>
           </a:blip>
           <a:stretch xmlns:a="http://schemas.openxmlformats.org/drawingml/2006/main"/>
@@ -3745,7 +3745,7 @@
           <p:nvPr/>
         </p:nvPicPr>
         <p:blipFill rotWithShape="1">
-          <a:blip xmlns:r="http://schemas.openxmlformats.org/officeDocument/2006/relationships" xmlns:a="http://schemas.openxmlformats.org/drawingml/2006/main" r:embed="R35ce2bfc04114d47">
+          <a:blip xmlns:r="http://schemas.openxmlformats.org/officeDocument/2006/relationships" xmlns:a="http://schemas.openxmlformats.org/drawingml/2006/main" r:embed="R001ce85eaedb4c1e">
             <a:alphaModFix amt="28000"/>
           </a:blip>
           <a:stretch xmlns:a="http://schemas.openxmlformats.org/drawingml/2006/main"/>
@@ -3982,17 +3982,17 @@
   </p:cSld>
   <p:clrMap bg1="lt1" tx1="dk1" bg2="lt2" tx2="dk2" accent1="accent1" accent2="accent2" accent3="accent3" accent4="accent4" accent5="accent5" accent6="accent6" hlink="hlink" folHlink="folHlink"/>
   <p:sldLayoutIdLst>
-    <p:sldLayoutId xmlns:r="http://schemas.openxmlformats.org/officeDocument/2006/relationships" id="2147483649" r:id="R9871943a74f74471"/>
-    <p:sldLayoutId xmlns:r="http://schemas.openxmlformats.org/officeDocument/2006/relationships" id="2147483650" r:id="R753fdd8b6b0541b8"/>
-    <p:sldLayoutId xmlns:r="http://schemas.openxmlformats.org/officeDocument/2006/relationships" id="2147483651" r:id="R145eb6b6878347ab"/>
-    <p:sldLayoutId xmlns:r="http://schemas.openxmlformats.org/officeDocument/2006/relationships" id="2147483652" r:id="R5d594b4024204643"/>
-    <p:sldLayoutId xmlns:r="http://schemas.openxmlformats.org/officeDocument/2006/relationships" id="2147483653" r:id="R31fae7bf5a7c48e0"/>
-    <p:sldLayoutId xmlns:r="http://schemas.openxmlformats.org/officeDocument/2006/relationships" id="2147483654" r:id="Rf90d06bb267646f6"/>
-    <p:sldLayoutId xmlns:r="http://schemas.openxmlformats.org/officeDocument/2006/relationships" id="2147483655" r:id="R5dcf5394c87d43ad"/>
-    <p:sldLayoutId xmlns:r="http://schemas.openxmlformats.org/officeDocument/2006/relationships" id="2147483656" r:id="R884239ccb12844bb"/>
-    <p:sldLayoutId xmlns:r="http://schemas.openxmlformats.org/officeDocument/2006/relationships" id="2147483657" r:id="Rc8a1e1a318a845d7"/>
-    <p:sldLayoutId xmlns:r="http://schemas.openxmlformats.org/officeDocument/2006/relationships" id="2147483658" r:id="R0822b044565641e4"/>
-    <p:sldLayoutId xmlns:r="http://schemas.openxmlformats.org/officeDocument/2006/relationships" id="2147483659" r:id="Rc3cda07b97214fd7"/>
+    <p:sldLayoutId xmlns:r="http://schemas.openxmlformats.org/officeDocument/2006/relationships" id="2147483649" r:id="Rbf4cf2b49c574b59"/>
+    <p:sldLayoutId xmlns:r="http://schemas.openxmlformats.org/officeDocument/2006/relationships" id="2147483650" r:id="R188eb8ecb0b949af"/>
+    <p:sldLayoutId xmlns:r="http://schemas.openxmlformats.org/officeDocument/2006/relationships" id="2147483651" r:id="R42eab4d9c21e4ec6"/>
+    <p:sldLayoutId xmlns:r="http://schemas.openxmlformats.org/officeDocument/2006/relationships" id="2147483652" r:id="R44426972d7a74a05"/>
+    <p:sldLayoutId xmlns:r="http://schemas.openxmlformats.org/officeDocument/2006/relationships" id="2147483653" r:id="R2d995b8033c94f58"/>
+    <p:sldLayoutId xmlns:r="http://schemas.openxmlformats.org/officeDocument/2006/relationships" id="2147483654" r:id="Recfcb65aa739475a"/>
+    <p:sldLayoutId xmlns:r="http://schemas.openxmlformats.org/officeDocument/2006/relationships" id="2147483655" r:id="Re886181a79664b3d"/>
+    <p:sldLayoutId xmlns:r="http://schemas.openxmlformats.org/officeDocument/2006/relationships" id="2147483656" r:id="R9d5f3456bf6c4b2f"/>
+    <p:sldLayoutId xmlns:r="http://schemas.openxmlformats.org/officeDocument/2006/relationships" id="2147483657" r:id="Re5d3ba7fb9184812"/>
+    <p:sldLayoutId xmlns:r="http://schemas.openxmlformats.org/officeDocument/2006/relationships" id="2147483658" r:id="R88d89eaf27504cbd"/>
+    <p:sldLayoutId xmlns:r="http://schemas.openxmlformats.org/officeDocument/2006/relationships" id="2147483659" r:id="R9a81b75a337745a7"/>
   </p:sldLayoutIdLst>
   <p:hf hdr="0" ftr="0" dt="0"/>
   <p:txStyles>
@@ -7153,18 +7153,21 @@
                 <a:ea typeface="Calibri"/>
                 <a:cs typeface="Calibri"/>
               </a:rPr>
-              <a:t>Change the program so [team] is displayed in upper case and [code] is displayed in lower case. Test </a:t>
-            </a:r>
-            <a:r>
-              <a:rPr sz="2400" b="0">
-                <a:solidFill>
-                  <a:srgbClr val="067D17"/>
-                </a:solidFill>
-                <a:latin typeface="JetBrains Mono"/>
-                <a:ea typeface="JetBrains Mono"/>
-                <a:cs typeface="JetBrains Mono"/>
-              </a:rPr>
-              <a:t>"Falcons"</a:t>
+              <a:t>Change the example so the code is displayed in uppercase and kept as typed in </a:t>
+            </a:r>
+            <a:r>
+              <a:rPr sz="2050" b="0">
+                <a:solidFill>
+                  <a:srgbClr val="6A1B9A"/>
+                </a:solidFill>
+                <a:highlight>
+                  <a:srgbClr val="ECEAF4"/>
+                </a:highlight>
+                <a:latin typeface="JetBrains Mono"/>
+                <a:ea typeface="JetBrains Mono"/>
+                <a:cs typeface="JetBrains Mono"/>
+              </a:rPr>
+              <a:t> typed_code </a:t>
             </a:r>
             <a:r>
               <a:rPr sz="2400" b="0">
@@ -7175,18 +7178,18 @@
                 <a:ea typeface="Calibri"/>
                 <a:cs typeface="Calibri"/>
               </a:rPr>
-              <a:t> and </a:t>
-            </a:r>
-            <a:r>
-              <a:rPr sz="2400" b="0">
-                <a:solidFill>
-                  <a:srgbClr val="067D17"/>
-                </a:solidFill>
-                <a:latin typeface="JetBrains Mono"/>
-                <a:ea typeface="JetBrains Mono"/>
-                <a:cs typeface="JetBrains Mono"/>
-              </a:rPr>
-              <a:t>"F7"</a:t>
+              <a:t>. Use an </a:t>
+            </a:r>
+            <a:r>
+              <a:rPr sz="2050" b="0">
+                <a:solidFill>
+                  <a:srgbClr val="1750EB"/>
+                </a:solidFill>
+                <a:latin typeface="JetBrains Mono"/>
+                <a:ea typeface="JetBrains Mono"/>
+                <a:cs typeface="JetBrains Mono"/>
+              </a:rPr>
+              <a:t>if</a:t>
             </a:r>
             <a:r>
               <a:rPr sz="2400" b="0">
@@ -7197,10 +7200,10 @@
                 <a:ea typeface="Calibri"/>
                 <a:cs typeface="Calibri"/>
               </a:rPr>
-              <a:t>; display </a:t>
-            </a:r>
-            <a:r>
-              <a:rPr sz="2400" b="0">
+              <a:t> statement to display </a:t>
+            </a:r>
+            <a:r>
+              <a:rPr sz="2050" b="0">
                 <a:solidFill>
                   <a:srgbClr val="067D17"/>
                 </a:solidFill>
@@ -7208,7 +7211,7 @@
                 <a:ea typeface="JetBrains Mono"/>
                 <a:cs typeface="JetBrains Mono"/>
               </a:rPr>
-              <a:t>"Team: FALCONS"</a:t>
+              <a:t>"Code format OK"</a:t>
             </a:r>
             <a:r>
               <a:rPr sz="2400" b="0">
@@ -7219,18 +7222,137 @@
                 <a:ea typeface="Calibri"/>
                 <a:cs typeface="Calibri"/>
               </a:rPr>
-              <a:t> and </a:t>
+              <a:t> when </a:t>
+            </a:r>
+            <a:r>
+              <a:rPr sz="2050" b="0">
+                <a:solidFill>
+                  <a:srgbClr val="6A1B9A"/>
+                </a:solidFill>
+                <a:highlight>
+                  <a:srgbClr val="ECEAF4"/>
+                </a:highlight>
+                <a:latin typeface="JetBrains Mono"/>
+                <a:ea typeface="JetBrains Mono"/>
+                <a:cs typeface="JetBrains Mono"/>
+              </a:rPr>
+              <a:t> typed_code </a:t>
             </a:r>
             <a:r>
               <a:rPr sz="2400" b="0">
                 <a:solidFill>
+                  <a:srgbClr val="080808"/>
+                </a:solidFill>
+                <a:latin typeface="Calibri"/>
+                <a:ea typeface="Calibri"/>
+                <a:cs typeface="Calibri"/>
+              </a:rPr>
+              <a:t> equals </a:t>
+            </a:r>
+            <a:r>
+              <a:rPr sz="2050" b="0">
+                <a:solidFill>
+                  <a:srgbClr val="6A1B9A"/>
+                </a:solidFill>
+                <a:highlight>
+                  <a:srgbClr val="ECEAF4"/>
+                </a:highlight>
+                <a:latin typeface="JetBrains Mono"/>
+                <a:ea typeface="JetBrains Mono"/>
+                <a:cs typeface="JetBrains Mono"/>
+              </a:rPr>
+              <a:t> code </a:t>
+            </a:r>
+            <a:r>
+              <a:rPr sz="2400" b="0">
+                <a:solidFill>
+                  <a:srgbClr val="080808"/>
+                </a:solidFill>
+                <a:latin typeface="Calibri"/>
+                <a:ea typeface="Calibri"/>
+                <a:cs typeface="Calibri"/>
+              </a:rPr>
+              <a:t>; otherwise display </a:t>
+            </a:r>
+            <a:r>
+              <a:rPr sz="2050" b="0">
+                <a:solidFill>
                   <a:srgbClr val="067D17"/>
                 </a:solidFill>
                 <a:latin typeface="JetBrains Mono"/>
                 <a:ea typeface="JetBrains Mono"/>
                 <a:cs typeface="JetBrains Mono"/>
               </a:rPr>
-              <a:t>"Code: f7"</a:t>
+              <a:t>"Code changed to"</a:t>
+            </a:r>
+            <a:r>
+              <a:rPr sz="2400" b="0">
+                <a:solidFill>
+                  <a:srgbClr val="080808"/>
+                </a:solidFill>
+                <a:latin typeface="Calibri"/>
+                <a:ea typeface="Calibri"/>
+                <a:cs typeface="Calibri"/>
+              </a:rPr>
+              <a:t> followed by </a:t>
+            </a:r>
+            <a:r>
+              <a:rPr sz="2050" b="0">
+                <a:solidFill>
+                  <a:srgbClr val="6A1B9A"/>
+                </a:solidFill>
+                <a:highlight>
+                  <a:srgbClr val="ECEAF4"/>
+                </a:highlight>
+                <a:latin typeface="JetBrains Mono"/>
+                <a:ea typeface="JetBrains Mono"/>
+                <a:cs typeface="JetBrains Mono"/>
+              </a:rPr>
+              <a:t> code </a:t>
+            </a:r>
+            <a:r>
+              <a:rPr sz="2400" b="0">
+                <a:solidFill>
+                  <a:srgbClr val="080808"/>
+                </a:solidFill>
+                <a:latin typeface="Calibri"/>
+                <a:ea typeface="Calibri"/>
+                <a:cs typeface="Calibri"/>
+              </a:rPr>
+              <a:t>. Test </a:t>
+            </a:r>
+            <a:r>
+              <a:rPr sz="2050" b="0">
+                <a:solidFill>
+                  <a:srgbClr val="067D17"/>
+                </a:solidFill>
+                <a:latin typeface="JetBrains Mono"/>
+                <a:ea typeface="JetBrains Mono"/>
+                <a:cs typeface="JetBrains Mono"/>
+              </a:rPr>
+              <a:t>"F7"</a:t>
+            </a:r>
+            <a:r>
+              <a:rPr sz="2400" b="0">
+                <a:solidFill>
+                  <a:srgbClr val="080808"/>
+                </a:solidFill>
+                <a:latin typeface="Calibri"/>
+                <a:ea typeface="Calibri"/>
+                <a:cs typeface="Calibri"/>
+              </a:rPr>
+              <a:t>, then </a:t>
+            </a:r>
+            <a:r>
+              <a:rPr sz="2050" b="0">
+                <a:solidFill>
+                  <a:srgbClr val="067D17"/>
+                </a:solidFill>
+                <a:latin typeface="JetBrains Mono"/>
+                <a:ea typeface="JetBrains Mono"/>
+                <a:cs typeface="JetBrains Mono"/>
+              </a:rPr>
+              <a:t>"f7"</a:t>
             </a:r>
             <a:r>
               <a:rPr sz="2400" b="0">
@@ -7886,10 +8008,10 @@
                 <a:ea typeface="Calibri"/>
                 <a:cs typeface="Calibri"/>
               </a:rPr>
-              <a:t>Ask the user to enter </a:t>
-            </a:r>
-            <a:r>
-              <a:rPr sz="2400" b="0">
+              <a:t>Change the example so it asks </a:t>
+            </a:r>
+            <a:r>
+              <a:rPr sz="2050" b="0">
                 <a:solidFill>
                   <a:srgbClr val="067D17"/>
                 </a:solidFill>
@@ -7897,7 +8019,7 @@
                 <a:ea typeface="JetBrains Mono"/>
                 <a:cs typeface="JetBrains Mono"/>
               </a:rPr>
-              <a:t>"yes"</a:t>
+              <a:t>"Accept? yes/no"</a:t>
             </a:r>
             <a:r>
               <a:rPr sz="2400" b="0">
@@ -7908,18 +8030,21 @@
                 <a:ea typeface="Calibri"/>
                 <a:cs typeface="Calibri"/>
               </a:rPr>
-              <a:t> or </a:t>
-            </a:r>
-            <a:r>
-              <a:rPr sz="2400" b="0">
-                <a:solidFill>
-                  <a:srgbClr val="067D17"/>
-                </a:solidFill>
-                <a:latin typeface="JetBrains Mono"/>
-                <a:ea typeface="JetBrains Mono"/>
-                <a:cs typeface="JetBrains Mono"/>
-              </a:rPr>
-              <a:t>"no"</a:t>
+              <a:t> and stores the answer in </a:t>
+            </a:r>
+            <a:r>
+              <a:rPr sz="2050" b="0">
+                <a:solidFill>
+                  <a:srgbClr val="6A1B9A"/>
+                </a:solidFill>
+                <a:highlight>
+                  <a:srgbClr val="ECEAF4"/>
+                </a:highlight>
+                <a:latin typeface="JetBrains Mono"/>
+                <a:ea typeface="JetBrains Mono"/>
+                <a:cs typeface="JetBrains Mono"/>
+              </a:rPr>
+              <a:t> response </a:t>
             </a:r>
             <a:r>
               <a:rPr sz="2400" b="0">
@@ -7930,10 +8055,10 @@
                 <a:ea typeface="Calibri"/>
                 <a:cs typeface="Calibri"/>
               </a:rPr>
-              <a:t> and store the answer in [response]. Store [response].</a:t>
-            </a:r>
-            <a:r>
-              <a:rPr sz="2400" b="0">
+              <a:t>. Use </a:t>
+            </a:r>
+            <a:r>
+              <a:rPr sz="2050" b="0">
                 <a:solidFill>
                   <a:srgbClr val="1750EB"/>
                 </a:solidFill>
@@ -7952,18 +8077,21 @@
                 <a:ea typeface="Calibri"/>
                 <a:cs typeface="Calibri"/>
               </a:rPr>
-              <a:t> back in [response]. Use an </a:t>
-            </a:r>
-            <a:r>
-              <a:rPr sz="2400" b="0">
-                <a:solidFill>
-                  <a:srgbClr val="1750EB"/>
-                </a:solidFill>
-                <a:latin typeface="JetBrains Mono"/>
-                <a:ea typeface="JetBrains Mono"/>
-                <a:cs typeface="JetBrains Mono"/>
-              </a:rPr>
-              <a:t>if</a:t>
+              <a:t> on </a:t>
+            </a:r>
+            <a:r>
+              <a:rPr sz="2050" b="0">
+                <a:solidFill>
+                  <a:srgbClr val="6A1B9A"/>
+                </a:solidFill>
+                <a:highlight>
+                  <a:srgbClr val="ECEAF4"/>
+                </a:highlight>
+                <a:latin typeface="JetBrains Mono"/>
+                <a:ea typeface="JetBrains Mono"/>
+                <a:cs typeface="JetBrains Mono"/>
+              </a:rPr>
+              <a:t> response </a:t>
             </a:r>
             <a:r>
               <a:rPr sz="2400" b="0">
@@ -7974,18 +8102,18 @@
                 <a:ea typeface="Calibri"/>
                 <a:cs typeface="Calibri"/>
               </a:rPr>
-              <a:t> statement to check whether [response] equals </a:t>
-            </a:r>
-            <a:r>
-              <a:rPr sz="2400" b="0">
-                <a:solidFill>
-                  <a:srgbClr val="067D17"/>
-                </a:solidFill>
-                <a:latin typeface="JetBrains Mono"/>
-                <a:ea typeface="JetBrains Mono"/>
-                <a:cs typeface="JetBrains Mono"/>
-              </a:rPr>
-              <a:t>"yes"</a:t>
+              <a:t>, then use </a:t>
+            </a:r>
+            <a:r>
+              <a:rPr sz="2050" b="0">
+                <a:solidFill>
+                  <a:srgbClr val="1750EB"/>
+                </a:solidFill>
+                <a:latin typeface="JetBrains Mono"/>
+                <a:ea typeface="JetBrains Mono"/>
+                <a:cs typeface="JetBrains Mono"/>
+              </a:rPr>
+              <a:t>if</a:t>
             </a:r>
             <a:r>
               <a:rPr sz="2400" b="0">
@@ -7996,18 +8124,18 @@
                 <a:ea typeface="Calibri"/>
                 <a:cs typeface="Calibri"/>
               </a:rPr>
-              <a:t>. Display </a:t>
-            </a:r>
-            <a:r>
-              <a:rPr sz="2400" b="0">
-                <a:solidFill>
-                  <a:srgbClr val="067D17"/>
-                </a:solidFill>
-                <a:latin typeface="JetBrains Mono"/>
-                <a:ea typeface="JetBrains Mono"/>
-                <a:cs typeface="JetBrains Mono"/>
-              </a:rPr>
-              <a:t>"Accepted"</a:t>
+              <a:t> and </a:t>
+            </a:r>
+            <a:r>
+              <a:rPr sz="2050" b="0">
+                <a:solidFill>
+                  <a:srgbClr val="1750EB"/>
+                </a:solidFill>
+                <a:latin typeface="JetBrains Mono"/>
+                <a:ea typeface="JetBrains Mono"/>
+                <a:cs typeface="JetBrains Mono"/>
+              </a:rPr>
+              <a:t>else</a:t>
             </a:r>
             <a:r>
               <a:rPr sz="2400" b="0">
@@ -8018,10 +8146,10 @@
                 <a:ea typeface="Calibri"/>
                 <a:cs typeface="Calibri"/>
               </a:rPr>
-              <a:t> when it does; otherwise display </a:t>
-            </a:r>
-            <a:r>
-              <a:rPr sz="2400" b="0">
+              <a:t> to display </a:t>
+            </a:r>
+            <a:r>
+              <a:rPr sz="2050" b="0">
                 <a:solidFill>
                   <a:srgbClr val="067D17"/>
                 </a:solidFill>
@@ -8029,7 +8157,7 @@
                 <a:ea typeface="JetBrains Mono"/>
                 <a:cs typeface="JetBrains Mono"/>
               </a:rPr>
-              <a:t>"Not accepted"</a:t>
+              <a:t>"Accepted"</a:t>
             </a:r>
             <a:r>
               <a:rPr sz="2400" b="0">
@@ -8040,10 +8168,10 @@
                 <a:ea typeface="Calibri"/>
                 <a:cs typeface="Calibri"/>
               </a:rPr>
-              <a:t>. Test </a:t>
-            </a:r>
-            <a:r>
-              <a:rPr sz="2400" b="0">
+              <a:t> for </a:t>
+            </a:r>
+            <a:r>
+              <a:rPr sz="2050" b="0">
                 <a:solidFill>
                   <a:srgbClr val="067D17"/>
                 </a:solidFill>
@@ -8051,7 +8179,7 @@
                 <a:ea typeface="JetBrains Mono"/>
                 <a:cs typeface="JetBrains Mono"/>
               </a:rPr>
-              <a:t>"YES"</a:t>
+              <a:t>"yes"</a:t>
             </a:r>
             <a:r>
               <a:rPr sz="2400" b="0">
@@ -8065,15 +8193,59 @@
               <a:t> and </a:t>
             </a:r>
             <a:r>
+              <a:rPr sz="2050" b="0">
+                <a:solidFill>
+                  <a:srgbClr val="067D17"/>
+                </a:solidFill>
+                <a:latin typeface="JetBrains Mono"/>
+                <a:ea typeface="JetBrains Mono"/>
+                <a:cs typeface="JetBrains Mono"/>
+              </a:rPr>
+              <a:t>"Not accepted"</a:t>
+            </a:r>
+            <a:r>
               <a:rPr sz="2400" b="0">
                 <a:solidFill>
+                  <a:srgbClr val="080808"/>
+                </a:solidFill>
+                <a:latin typeface="Calibri"/>
+                <a:ea typeface="Calibri"/>
+                <a:cs typeface="Calibri"/>
+              </a:rPr>
+              <a:t> otherwise. For example, </a:t>
+            </a:r>
+            <a:r>
+              <a:rPr sz="2050" b="0">
+                <a:solidFill>
                   <a:srgbClr val="067D17"/>
                 </a:solidFill>
                 <a:latin typeface="JetBrains Mono"/>
                 <a:ea typeface="JetBrains Mono"/>
                 <a:cs typeface="JetBrains Mono"/>
               </a:rPr>
-              <a:t>"no"</a:t>
+              <a:t>"YES"</a:t>
+            </a:r>
+            <a:r>
+              <a:rPr sz="2400" b="0">
+                <a:solidFill>
+                  <a:srgbClr val="080808"/>
+                </a:solidFill>
+                <a:latin typeface="Calibri"/>
+                <a:ea typeface="Calibri"/>
+                <a:cs typeface="Calibri"/>
+              </a:rPr>
+              <a:t> displays </a:t>
+            </a:r>
+            <a:r>
+              <a:rPr sz="2050" b="0">
+                <a:solidFill>
+                  <a:srgbClr val="067D17"/>
+                </a:solidFill>
+                <a:latin typeface="JetBrains Mono"/>
+                <a:ea typeface="JetBrains Mono"/>
+                <a:cs typeface="JetBrains Mono"/>
+              </a:rPr>
+              <a:t>"Accepted"</a:t>
             </a:r>
             <a:r>
               <a:rPr sz="2400" b="0">
@@ -8729,10 +8901,10 @@
                 <a:ea typeface="Calibri"/>
                 <a:cs typeface="Calibri"/>
               </a:rPr>
-              <a:t>Ask for a first name and store it in [name]. Ask for a two-letter group code, such as </a:t>
-            </a:r>
-            <a:r>
-              <a:rPr sz="2400" b="0">
+              <a:t>Create a password checker that asks for a new password twice. Display </a:t>
+            </a:r>
+            <a:r>
+              <a:rPr sz="2050" b="0">
                 <a:solidFill>
                   <a:srgbClr val="067D17"/>
                 </a:solidFill>
@@ -8740,7 +8912,7 @@
                 <a:ea typeface="JetBrains Mono"/>
                 <a:cs typeface="JetBrains Mono"/>
               </a:rPr>
-              <a:t>"ab"</a:t>
+              <a:t>"Thank you"</a:t>
             </a:r>
             <a:r>
               <a:rPr sz="2400" b="0">
@@ -8751,18 +8923,18 @@
                 <a:ea typeface="Calibri"/>
                 <a:cs typeface="Calibri"/>
               </a:rPr>
-              <a:t>, and store it in [group]. Display [name] in lower case and [group] in upper case on separate labelled lines. Test </a:t>
-            </a:r>
-            <a:r>
-              <a:rPr sz="2400" b="0">
-                <a:solidFill>
-                  <a:srgbClr val="067D17"/>
-                </a:solidFill>
-                <a:latin typeface="JetBrains Mono"/>
-                <a:ea typeface="JetBrains Mono"/>
-                <a:cs typeface="JetBrains Mono"/>
-              </a:rPr>
-              <a:t>"Ava"</a:t>
+              <a:t> if the two match exactly. If they only match after using </a:t>
+            </a:r>
+            <a:r>
+              <a:rPr sz="2050" b="0">
+                <a:solidFill>
+                  <a:srgbClr val="1750EB"/>
+                </a:solidFill>
+                <a:latin typeface="JetBrains Mono"/>
+                <a:ea typeface="JetBrains Mono"/>
+                <a:cs typeface="JetBrains Mono"/>
+              </a:rPr>
+              <a:t>lower()</a:t>
             </a:r>
             <a:r>
               <a:rPr sz="2400" b="0">
@@ -8773,10 +8945,10 @@
                 <a:ea typeface="Calibri"/>
                 <a:cs typeface="Calibri"/>
               </a:rPr>
-              <a:t> and </a:t>
-            </a:r>
-            <a:r>
-              <a:rPr sz="2400" b="0">
+              <a:t> on both, display </a:t>
+            </a:r>
+            <a:r>
+              <a:rPr sz="2050" b="0">
                 <a:solidFill>
                   <a:srgbClr val="067D17"/>
                 </a:solidFill>
@@ -8784,7 +8956,7 @@
                 <a:ea typeface="JetBrains Mono"/>
                 <a:cs typeface="JetBrains Mono"/>
               </a:rPr>
-              <a:t>"ab"</a:t>
+              <a:t>"They must be in the same case"</a:t>
             </a:r>
             <a:r>
               <a:rPr sz="2400" b="0">
@@ -8795,10 +8967,10 @@
                 <a:ea typeface="Calibri"/>
                 <a:cs typeface="Calibri"/>
               </a:rPr>
-              <a:t>; display </a:t>
-            </a:r>
-            <a:r>
-              <a:rPr sz="2400" b="0">
+              <a:t>. Otherwise display </a:t>
+            </a:r>
+            <a:r>
+              <a:rPr sz="2050" b="0">
                 <a:solidFill>
                   <a:srgbClr val="067D17"/>
                 </a:solidFill>
@@ -8806,7 +8978,7 @@
                 <a:ea typeface="JetBrains Mono"/>
                 <a:cs typeface="JetBrains Mono"/>
               </a:rPr>
-              <a:t>"Account name: ava"</a:t>
+              <a:t>"Incorrect"</a:t>
             </a:r>
             <a:r>
               <a:rPr sz="2400" b="0">
@@ -8817,10 +8989,76 @@
                 <a:ea typeface="Calibri"/>
                 <a:cs typeface="Calibri"/>
               </a:rPr>
+              <a:t>. Test </a:t>
+            </a:r>
+            <a:r>
+              <a:rPr sz="2050" b="0">
+                <a:solidFill>
+                  <a:srgbClr val="067D17"/>
+                </a:solidFill>
+                <a:latin typeface="JetBrains Mono"/>
+                <a:ea typeface="JetBrains Mono"/>
+                <a:cs typeface="JetBrains Mono"/>
+              </a:rPr>
+              <a:t>"Code"</a:t>
+            </a:r>
+            <a:r>
+              <a:rPr sz="2400" b="0">
+                <a:solidFill>
+                  <a:srgbClr val="080808"/>
+                </a:solidFill>
+                <a:latin typeface="Calibri"/>
+                <a:ea typeface="Calibri"/>
+                <a:cs typeface="Calibri"/>
+              </a:rPr>
+              <a:t> with </a:t>
+            </a:r>
+            <a:r>
+              <a:rPr sz="2050" b="0">
+                <a:solidFill>
+                  <a:srgbClr val="067D17"/>
+                </a:solidFill>
+                <a:latin typeface="JetBrains Mono"/>
+                <a:ea typeface="JetBrains Mono"/>
+                <a:cs typeface="JetBrains Mono"/>
+              </a:rPr>
+              <a:t>"Code"</a:t>
+            </a:r>
+            <a:r>
+              <a:rPr sz="2400" b="0">
+                <a:solidFill>
+                  <a:srgbClr val="080808"/>
+                </a:solidFill>
+                <a:latin typeface="Calibri"/>
+                <a:ea typeface="Calibri"/>
+                <a:cs typeface="Calibri"/>
+              </a:rPr>
+              <a:t>, </a:t>
+            </a:r>
+            <a:r>
+              <a:rPr sz="2050" b="0">
+                <a:solidFill>
+                  <a:srgbClr val="067D17"/>
+                </a:solidFill>
+                <a:latin typeface="JetBrains Mono"/>
+                <a:ea typeface="JetBrains Mono"/>
+                <a:cs typeface="JetBrains Mono"/>
+              </a:rPr>
+              <a:t>"code"</a:t>
+            </a:r>
+            <a:r>
+              <a:rPr sz="2400" b="0">
+                <a:solidFill>
+                  <a:srgbClr val="080808"/>
+                </a:solidFill>
+                <a:latin typeface="Calibri"/>
+                <a:ea typeface="Calibri"/>
+                <a:cs typeface="Calibri"/>
+              </a:rPr>
               <a:t> and </a:t>
             </a:r>
             <a:r>
-              <a:rPr sz="2400" b="0">
+              <a:rPr sz="2050" b="0">
                 <a:solidFill>
                   <a:srgbClr val="067D17"/>
                 </a:solidFill>
@@ -8828,7 +9066,7 @@
                 <a:ea typeface="JetBrains Mono"/>
                 <a:cs typeface="JetBrains Mono"/>
               </a:rPr>
-              <a:t>"Group code: AB"</a:t>
+              <a:t>"cake"</a:t>
             </a:r>
             <a:r>
               <a:rPr sz="2400" b="0">

--- a/Mapped Curriculum Lessons/Grade 7/Lesson 14 - Changing Text Case/Changing Text Case - Slides.pptx
+++ b/Mapped Curriculum Lessons/Grade 7/Lesson 14 - Changing Text Case/Changing Text Case - Slides.pptx
@@ -2,28 +2,28 @@
 <file path=ppt/presentation.xml><?xml version="1.0" encoding="utf-8"?>
 <p:presentation xmlns:p="http://schemas.openxmlformats.org/presentationml/2006/main" embedTrueTypeFonts="1" saveSubsetFonts="0">
   <p:sldMasterIdLst>
-    <p:sldMasterId xmlns:r="http://schemas.openxmlformats.org/officeDocument/2006/relationships" id="2147483648" r:id="R95768b7283fc4fcc"/>
+    <p:sldMasterId xmlns:r="http://schemas.openxmlformats.org/officeDocument/2006/relationships" id="2147483648" r:id="R5dc37632ea5943be"/>
   </p:sldMasterIdLst>
   <p:notesMasterIdLst>
-    <p:notesMasterId xmlns:r="http://schemas.openxmlformats.org/officeDocument/2006/relationships" r:id="Rc8b2e7124e394bb2"/>
+    <p:notesMasterId xmlns:r="http://schemas.openxmlformats.org/officeDocument/2006/relationships" r:id="R8736f0afff734096"/>
   </p:notesMasterIdLst>
   <p:sldIdLst>
-    <p:sldId xmlns:r="http://schemas.openxmlformats.org/officeDocument/2006/relationships" id="256" r:id="R9d94478a06004b09"/>
-    <p:sldId xmlns:r="http://schemas.openxmlformats.org/officeDocument/2006/relationships" id="257" r:id="R118b87c13c2841a2"/>
-    <p:sldId xmlns:r="http://schemas.openxmlformats.org/officeDocument/2006/relationships" id="258" r:id="Reb99fb865cca44d1"/>
-    <p:sldId xmlns:r="http://schemas.openxmlformats.org/officeDocument/2006/relationships" id="259" r:id="R643b064850324de3"/>
-    <p:sldId xmlns:r="http://schemas.openxmlformats.org/officeDocument/2006/relationships" id="260" r:id="R38d174ff429f4db4"/>
-    <p:sldId xmlns:r="http://schemas.openxmlformats.org/officeDocument/2006/relationships" id="261" r:id="R7029ea7b78244dad"/>
-    <p:sldId xmlns:r="http://schemas.openxmlformats.org/officeDocument/2006/relationships" id="262" r:id="Racb72bf2e0d149e5"/>
-    <p:sldId xmlns:r="http://schemas.openxmlformats.org/officeDocument/2006/relationships" id="263" r:id="Rd2e29b99340a47cc"/>
-    <p:sldId xmlns:r="http://schemas.openxmlformats.org/officeDocument/2006/relationships" id="264" r:id="R8d2cc31dcd5c424e"/>
+    <p:sldId xmlns:r="http://schemas.openxmlformats.org/officeDocument/2006/relationships" id="256" r:id="R70aa1d1d1bce4a53"/>
+    <p:sldId xmlns:r="http://schemas.openxmlformats.org/officeDocument/2006/relationships" id="257" r:id="Re0769984bfb64ae1"/>
+    <p:sldId xmlns:r="http://schemas.openxmlformats.org/officeDocument/2006/relationships" id="258" r:id="R9e51df3998be4fca"/>
+    <p:sldId xmlns:r="http://schemas.openxmlformats.org/officeDocument/2006/relationships" id="259" r:id="Rba0dc9eb5d054daf"/>
+    <p:sldId xmlns:r="http://schemas.openxmlformats.org/officeDocument/2006/relationships" id="260" r:id="Rbdaf20bb7fac4367"/>
+    <p:sldId xmlns:r="http://schemas.openxmlformats.org/officeDocument/2006/relationships" id="261" r:id="Rfb2386c5274c4df1"/>
+    <p:sldId xmlns:r="http://schemas.openxmlformats.org/officeDocument/2006/relationships" id="262" r:id="Rfe81d728e8364da9"/>
+    <p:sldId xmlns:r="http://schemas.openxmlformats.org/officeDocument/2006/relationships" id="263" r:id="R828818279cb041fb"/>
+    <p:sldId xmlns:r="http://schemas.openxmlformats.org/officeDocument/2006/relationships" id="264" r:id="R71cac5e5791d49fa"/>
   </p:sldIdLst>
   <p:sldSz cx="12192000" cy="6858000"/>
   <p:notesSz cx="6858000" cy="9144000"/>
   <p:embeddedFontLst>
     <p:embeddedFont>
       <p:font typeface="JetBrains Mono"/>
-      <p:regular xmlns:r="http://schemas.openxmlformats.org/officeDocument/2006/relationships" r:id="R5547da640d734307"/>
+      <p:regular xmlns:r="http://schemas.openxmlformats.org/officeDocument/2006/relationships" r:id="R7a6b3cf0401c48f6"/>
     </p:embeddedFont>
   </p:embeddedFontLst>
 </p:presentation>
@@ -1071,7 +1071,7 @@
           <p:nvPr/>
         </p:nvPicPr>
         <p:blipFill rotWithShape="1">
-          <a:blip xmlns:r="http://schemas.openxmlformats.org/officeDocument/2006/relationships" xmlns:a="http://schemas.openxmlformats.org/drawingml/2006/main" r:embed="Rab2989d1daba4024"/>
+          <a:blip xmlns:r="http://schemas.openxmlformats.org/officeDocument/2006/relationships" xmlns:a="http://schemas.openxmlformats.org/drawingml/2006/main" r:embed="R51a3180f987a4a55"/>
           <a:stretch xmlns:a="http://schemas.openxmlformats.org/drawingml/2006/main"/>
         </p:blipFill>
         <p:spPr>
@@ -1451,7 +1451,7 @@
           <p:nvPr/>
         </p:nvPicPr>
         <p:blipFill rotWithShape="1">
-          <a:blip xmlns:r="http://schemas.openxmlformats.org/officeDocument/2006/relationships" xmlns:a="http://schemas.openxmlformats.org/drawingml/2006/main" r:embed="R8480d8592ad14e1e">
+          <a:blip xmlns:r="http://schemas.openxmlformats.org/officeDocument/2006/relationships" xmlns:a="http://schemas.openxmlformats.org/drawingml/2006/main" r:embed="R6250541d3f5f4d2f">
             <a:alphaModFix amt="28000"/>
           </a:blip>
           <a:stretch xmlns:a="http://schemas.openxmlformats.org/drawingml/2006/main"/>
@@ -1664,7 +1664,7 @@
           <p:nvPr/>
         </p:nvPicPr>
         <p:blipFill rotWithShape="1">
-          <a:blip xmlns:r="http://schemas.openxmlformats.org/officeDocument/2006/relationships" xmlns:a="http://schemas.openxmlformats.org/drawingml/2006/main" r:embed="Rb84932485f5c4ff4">
+          <a:blip xmlns:r="http://schemas.openxmlformats.org/officeDocument/2006/relationships" xmlns:a="http://schemas.openxmlformats.org/drawingml/2006/main" r:embed="R382123657cbd45a2">
             <a:alphaModFix amt="28000"/>
           </a:blip>
           <a:stretch xmlns:a="http://schemas.openxmlformats.org/drawingml/2006/main"/>
@@ -1899,7 +1899,7 @@
           <p:nvPr/>
         </p:nvPicPr>
         <p:blipFill rotWithShape="1">
-          <a:blip xmlns:r="http://schemas.openxmlformats.org/officeDocument/2006/relationships" xmlns:a="http://schemas.openxmlformats.org/drawingml/2006/main" r:embed="Rc63e1227de9a4557">
+          <a:blip xmlns:r="http://schemas.openxmlformats.org/officeDocument/2006/relationships" xmlns:a="http://schemas.openxmlformats.org/drawingml/2006/main" r:embed="R2fb8c0af9002478b">
             <a:alphaModFix amt="28000"/>
           </a:blip>
           <a:stretch xmlns:a="http://schemas.openxmlformats.org/drawingml/2006/main"/>
@@ -2176,7 +2176,7 @@
           <p:nvPr/>
         </p:nvPicPr>
         <p:blipFill rotWithShape="1">
-          <a:blip xmlns:r="http://schemas.openxmlformats.org/officeDocument/2006/relationships" xmlns:a="http://schemas.openxmlformats.org/drawingml/2006/main" r:embed="R517135f4401a41ab">
+          <a:blip xmlns:r="http://schemas.openxmlformats.org/officeDocument/2006/relationships" xmlns:a="http://schemas.openxmlformats.org/drawingml/2006/main" r:embed="R4a4a7a83a8b4431a">
             <a:alphaModFix amt="28000"/>
           </a:blip>
           <a:stretch xmlns:a="http://schemas.openxmlformats.org/drawingml/2006/main"/>
@@ -2451,7 +2451,7 @@
           <p:nvPr/>
         </p:nvPicPr>
         <p:blipFill rotWithShape="1">
-          <a:blip xmlns:r="http://schemas.openxmlformats.org/officeDocument/2006/relationships" xmlns:a="http://schemas.openxmlformats.org/drawingml/2006/main" r:embed="R07430c843faa4234">
+          <a:blip xmlns:r="http://schemas.openxmlformats.org/officeDocument/2006/relationships" xmlns:a="http://schemas.openxmlformats.org/drawingml/2006/main" r:embed="Re3e561aef7eb49d1">
             <a:alphaModFix amt="28000"/>
           </a:blip>
           <a:stretch xmlns:a="http://schemas.openxmlformats.org/drawingml/2006/main"/>
@@ -2875,7 +2875,7 @@
           <p:nvPr/>
         </p:nvPicPr>
         <p:blipFill rotWithShape="1">
-          <a:blip xmlns:r="http://schemas.openxmlformats.org/officeDocument/2006/relationships" xmlns:a="http://schemas.openxmlformats.org/drawingml/2006/main" r:embed="R5891ffe17dfd4840">
+          <a:blip xmlns:r="http://schemas.openxmlformats.org/officeDocument/2006/relationships" xmlns:a="http://schemas.openxmlformats.org/drawingml/2006/main" r:embed="Re26c439166b44a6f">
             <a:alphaModFix amt="28000"/>
           </a:blip>
           <a:stretch xmlns:a="http://schemas.openxmlformats.org/drawingml/2006/main"/>
@@ -3016,7 +3016,7 @@
           <p:nvPr/>
         </p:nvPicPr>
         <p:blipFill rotWithShape="1">
-          <a:blip xmlns:r="http://schemas.openxmlformats.org/officeDocument/2006/relationships" xmlns:a="http://schemas.openxmlformats.org/drawingml/2006/main" r:embed="R90396bfd18f74da5">
+          <a:blip xmlns:r="http://schemas.openxmlformats.org/officeDocument/2006/relationships" xmlns:a="http://schemas.openxmlformats.org/drawingml/2006/main" r:embed="Raa83ee9c6e464c82">
             <a:alphaModFix amt="28000"/>
           </a:blip>
           <a:stretch xmlns:a="http://schemas.openxmlformats.org/drawingml/2006/main"/>
@@ -3130,7 +3130,7 @@
           <p:nvPr/>
         </p:nvPicPr>
         <p:blipFill rotWithShape="1">
-          <a:blip xmlns:r="http://schemas.openxmlformats.org/officeDocument/2006/relationships" xmlns:a="http://schemas.openxmlformats.org/drawingml/2006/main" r:embed="Rb9bc75a5b11f4c1c">
+          <a:blip xmlns:r="http://schemas.openxmlformats.org/officeDocument/2006/relationships" xmlns:a="http://schemas.openxmlformats.org/drawingml/2006/main" r:embed="R76b14a4afe274c0d">
             <a:alphaModFix amt="28000"/>
           </a:blip>
           <a:stretch xmlns:a="http://schemas.openxmlformats.org/drawingml/2006/main"/>
@@ -3457,7 +3457,7 @@
           <p:nvPr/>
         </p:nvPicPr>
         <p:blipFill rotWithShape="1">
-          <a:blip xmlns:r="http://schemas.openxmlformats.org/officeDocument/2006/relationships" xmlns:a="http://schemas.openxmlformats.org/drawingml/2006/main" r:embed="R26717c383f6a4ef5">
+          <a:blip xmlns:r="http://schemas.openxmlformats.org/officeDocument/2006/relationships" xmlns:a="http://schemas.openxmlformats.org/drawingml/2006/main" r:embed="R2e9c1c92779c44f8">
             <a:alphaModFix amt="28000"/>
           </a:blip>
           <a:stretch xmlns:a="http://schemas.openxmlformats.org/drawingml/2006/main"/>
@@ -3745,7 +3745,7 @@
           <p:nvPr/>
         </p:nvPicPr>
         <p:blipFill rotWithShape="1">
-          <a:blip xmlns:r="http://schemas.openxmlformats.org/officeDocument/2006/relationships" xmlns:a="http://schemas.openxmlformats.org/drawingml/2006/main" r:embed="R001ce85eaedb4c1e">
+          <a:blip xmlns:r="http://schemas.openxmlformats.org/officeDocument/2006/relationships" xmlns:a="http://schemas.openxmlformats.org/drawingml/2006/main" r:embed="Rc756355c8fcf4109">
             <a:alphaModFix amt="28000"/>
           </a:blip>
           <a:stretch xmlns:a="http://schemas.openxmlformats.org/drawingml/2006/main"/>
@@ -3982,17 +3982,17 @@
   </p:cSld>
   <p:clrMap bg1="lt1" tx1="dk1" bg2="lt2" tx2="dk2" accent1="accent1" accent2="accent2" accent3="accent3" accent4="accent4" accent5="accent5" accent6="accent6" hlink="hlink" folHlink="folHlink"/>
   <p:sldLayoutIdLst>
-    <p:sldLayoutId xmlns:r="http://schemas.openxmlformats.org/officeDocument/2006/relationships" id="2147483649" r:id="Rbf4cf2b49c574b59"/>
-    <p:sldLayoutId xmlns:r="http://schemas.openxmlformats.org/officeDocument/2006/relationships" id="2147483650" r:id="R188eb8ecb0b949af"/>
-    <p:sldLayoutId xmlns:r="http://schemas.openxmlformats.org/officeDocument/2006/relationships" id="2147483651" r:id="R42eab4d9c21e4ec6"/>
-    <p:sldLayoutId xmlns:r="http://schemas.openxmlformats.org/officeDocument/2006/relationships" id="2147483652" r:id="R44426972d7a74a05"/>
-    <p:sldLayoutId xmlns:r="http://schemas.openxmlformats.org/officeDocument/2006/relationships" id="2147483653" r:id="R2d995b8033c94f58"/>
-    <p:sldLayoutId xmlns:r="http://schemas.openxmlformats.org/officeDocument/2006/relationships" id="2147483654" r:id="Recfcb65aa739475a"/>
-    <p:sldLayoutId xmlns:r="http://schemas.openxmlformats.org/officeDocument/2006/relationships" id="2147483655" r:id="Re886181a79664b3d"/>
-    <p:sldLayoutId xmlns:r="http://schemas.openxmlformats.org/officeDocument/2006/relationships" id="2147483656" r:id="R9d5f3456bf6c4b2f"/>
-    <p:sldLayoutId xmlns:r="http://schemas.openxmlformats.org/officeDocument/2006/relationships" id="2147483657" r:id="Re5d3ba7fb9184812"/>
-    <p:sldLayoutId xmlns:r="http://schemas.openxmlformats.org/officeDocument/2006/relationships" id="2147483658" r:id="R88d89eaf27504cbd"/>
-    <p:sldLayoutId xmlns:r="http://schemas.openxmlformats.org/officeDocument/2006/relationships" id="2147483659" r:id="R9a81b75a337745a7"/>
+    <p:sldLayoutId xmlns:r="http://schemas.openxmlformats.org/officeDocument/2006/relationships" id="2147483649" r:id="R0d4cc345c24947f8"/>
+    <p:sldLayoutId xmlns:r="http://schemas.openxmlformats.org/officeDocument/2006/relationships" id="2147483650" r:id="R91119a66e6da4527"/>
+    <p:sldLayoutId xmlns:r="http://schemas.openxmlformats.org/officeDocument/2006/relationships" id="2147483651" r:id="R3079bc8a025847ad"/>
+    <p:sldLayoutId xmlns:r="http://schemas.openxmlformats.org/officeDocument/2006/relationships" id="2147483652" r:id="R0ddbe86b2af541b4"/>
+    <p:sldLayoutId xmlns:r="http://schemas.openxmlformats.org/officeDocument/2006/relationships" id="2147483653" r:id="R3180fd76676c477a"/>
+    <p:sldLayoutId xmlns:r="http://schemas.openxmlformats.org/officeDocument/2006/relationships" id="2147483654" r:id="R8c1abed622674852"/>
+    <p:sldLayoutId xmlns:r="http://schemas.openxmlformats.org/officeDocument/2006/relationships" id="2147483655" r:id="Re46058a43f6842b2"/>
+    <p:sldLayoutId xmlns:r="http://schemas.openxmlformats.org/officeDocument/2006/relationships" id="2147483656" r:id="R9f58ed01cd164e4d"/>
+    <p:sldLayoutId xmlns:r="http://schemas.openxmlformats.org/officeDocument/2006/relationships" id="2147483657" r:id="R44e953e28bd24eb8"/>
+    <p:sldLayoutId xmlns:r="http://schemas.openxmlformats.org/officeDocument/2006/relationships" id="2147483658" r:id="R1931271c8af94550"/>
+    <p:sldLayoutId xmlns:r="http://schemas.openxmlformats.org/officeDocument/2006/relationships" id="2147483659" r:id="R542895f7bf574bd9"/>
   </p:sldLayoutIdLst>
   <p:hf hdr="0" ftr="0" dt="0"/>
   <p:txStyles>
@@ -7183,7 +7183,7 @@
             <a:r>
               <a:rPr sz="2050" b="0">
                 <a:solidFill>
-                  <a:srgbClr val="1750EB"/>
+                  <a:srgbClr val="C45E00"/>
                 </a:solidFill>
                 <a:latin typeface="JetBrains Mono"/>
                 <a:ea typeface="JetBrains Mono"/>
@@ -8107,7 +8107,7 @@
             <a:r>
               <a:rPr sz="2050" b="0">
                 <a:solidFill>
-                  <a:srgbClr val="1750EB"/>
+                  <a:srgbClr val="C45E00"/>
                 </a:solidFill>
                 <a:latin typeface="JetBrains Mono"/>
                 <a:ea typeface="JetBrains Mono"/>
@@ -8129,7 +8129,7 @@
             <a:r>
               <a:rPr sz="2050" b="0">
                 <a:solidFill>
-                  <a:srgbClr val="1750EB"/>
+                  <a:srgbClr val="C45E00"/>
                 </a:solidFill>
                 <a:latin typeface="JetBrains Mono"/>
                 <a:ea typeface="JetBrains Mono"/>

--- a/Mapped Curriculum Lessons/Grade 7/Lesson 14 - Changing Text Case/Changing Text Case - Slides.pptx
+++ b/Mapped Curriculum Lessons/Grade 7/Lesson 14 - Changing Text Case/Changing Text Case - Slides.pptx
@@ -2,28 +2,28 @@
 <file path=ppt/presentation.xml><?xml version="1.0" encoding="utf-8"?>
 <p:presentation xmlns:p="http://schemas.openxmlformats.org/presentationml/2006/main" embedTrueTypeFonts="1" saveSubsetFonts="0">
   <p:sldMasterIdLst>
-    <p:sldMasterId xmlns:r="http://schemas.openxmlformats.org/officeDocument/2006/relationships" id="2147483648" r:id="R5dc37632ea5943be"/>
+    <p:sldMasterId xmlns:r="http://schemas.openxmlformats.org/officeDocument/2006/relationships" id="2147483648" r:id="Rec736d6efb014521"/>
   </p:sldMasterIdLst>
   <p:notesMasterIdLst>
-    <p:notesMasterId xmlns:r="http://schemas.openxmlformats.org/officeDocument/2006/relationships" r:id="R8736f0afff734096"/>
+    <p:notesMasterId xmlns:r="http://schemas.openxmlformats.org/officeDocument/2006/relationships" r:id="Rf6504696bcb54b59"/>
   </p:notesMasterIdLst>
   <p:sldIdLst>
-    <p:sldId xmlns:r="http://schemas.openxmlformats.org/officeDocument/2006/relationships" id="256" r:id="R70aa1d1d1bce4a53"/>
-    <p:sldId xmlns:r="http://schemas.openxmlformats.org/officeDocument/2006/relationships" id="257" r:id="Re0769984bfb64ae1"/>
-    <p:sldId xmlns:r="http://schemas.openxmlformats.org/officeDocument/2006/relationships" id="258" r:id="R9e51df3998be4fca"/>
-    <p:sldId xmlns:r="http://schemas.openxmlformats.org/officeDocument/2006/relationships" id="259" r:id="Rba0dc9eb5d054daf"/>
-    <p:sldId xmlns:r="http://schemas.openxmlformats.org/officeDocument/2006/relationships" id="260" r:id="Rbdaf20bb7fac4367"/>
-    <p:sldId xmlns:r="http://schemas.openxmlformats.org/officeDocument/2006/relationships" id="261" r:id="Rfb2386c5274c4df1"/>
-    <p:sldId xmlns:r="http://schemas.openxmlformats.org/officeDocument/2006/relationships" id="262" r:id="Rfe81d728e8364da9"/>
-    <p:sldId xmlns:r="http://schemas.openxmlformats.org/officeDocument/2006/relationships" id="263" r:id="R828818279cb041fb"/>
-    <p:sldId xmlns:r="http://schemas.openxmlformats.org/officeDocument/2006/relationships" id="264" r:id="R71cac5e5791d49fa"/>
+    <p:sldId xmlns:r="http://schemas.openxmlformats.org/officeDocument/2006/relationships" id="256" r:id="R694909243d664250"/>
+    <p:sldId xmlns:r="http://schemas.openxmlformats.org/officeDocument/2006/relationships" id="257" r:id="R740d74d385b047b1"/>
+    <p:sldId xmlns:r="http://schemas.openxmlformats.org/officeDocument/2006/relationships" id="258" r:id="R62bfbb9f1fb44aa6"/>
+    <p:sldId xmlns:r="http://schemas.openxmlformats.org/officeDocument/2006/relationships" id="259" r:id="R68c258dc1d1b4331"/>
+    <p:sldId xmlns:r="http://schemas.openxmlformats.org/officeDocument/2006/relationships" id="260" r:id="R350385dff9234d83"/>
+    <p:sldId xmlns:r="http://schemas.openxmlformats.org/officeDocument/2006/relationships" id="261" r:id="R57eab040866441d0"/>
+    <p:sldId xmlns:r="http://schemas.openxmlformats.org/officeDocument/2006/relationships" id="262" r:id="R104e81b5111a4b8a"/>
+    <p:sldId xmlns:r="http://schemas.openxmlformats.org/officeDocument/2006/relationships" id="263" r:id="R95640da912334b9e"/>
+    <p:sldId xmlns:r="http://schemas.openxmlformats.org/officeDocument/2006/relationships" id="264" r:id="Ra1fb2d0c15684e18"/>
   </p:sldIdLst>
   <p:sldSz cx="12192000" cy="6858000"/>
   <p:notesSz cx="6858000" cy="9144000"/>
   <p:embeddedFontLst>
     <p:embeddedFont>
       <p:font typeface="JetBrains Mono"/>
-      <p:regular xmlns:r="http://schemas.openxmlformats.org/officeDocument/2006/relationships" r:id="R7a6b3cf0401c48f6"/>
+      <p:regular xmlns:r="http://schemas.openxmlformats.org/officeDocument/2006/relationships" r:id="Raec53b373d2a40e9"/>
     </p:embeddedFont>
   </p:embeddedFontLst>
 </p:presentation>
@@ -1071,7 +1071,7 @@
           <p:nvPr/>
         </p:nvPicPr>
         <p:blipFill rotWithShape="1">
-          <a:blip xmlns:r="http://schemas.openxmlformats.org/officeDocument/2006/relationships" xmlns:a="http://schemas.openxmlformats.org/drawingml/2006/main" r:embed="R51a3180f987a4a55"/>
+          <a:blip xmlns:r="http://schemas.openxmlformats.org/officeDocument/2006/relationships" xmlns:a="http://schemas.openxmlformats.org/drawingml/2006/main" r:embed="R1737de0c0cf44b65"/>
           <a:stretch xmlns:a="http://schemas.openxmlformats.org/drawingml/2006/main"/>
         </p:blipFill>
         <p:spPr>
@@ -1451,7 +1451,7 @@
           <p:nvPr/>
         </p:nvPicPr>
         <p:blipFill rotWithShape="1">
-          <a:blip xmlns:r="http://schemas.openxmlformats.org/officeDocument/2006/relationships" xmlns:a="http://schemas.openxmlformats.org/drawingml/2006/main" r:embed="R6250541d3f5f4d2f">
+          <a:blip xmlns:r="http://schemas.openxmlformats.org/officeDocument/2006/relationships" xmlns:a="http://schemas.openxmlformats.org/drawingml/2006/main" r:embed="Rd8cbe73798d64878">
             <a:alphaModFix amt="28000"/>
           </a:blip>
           <a:stretch xmlns:a="http://schemas.openxmlformats.org/drawingml/2006/main"/>
@@ -1664,7 +1664,7 @@
           <p:nvPr/>
         </p:nvPicPr>
         <p:blipFill rotWithShape="1">
-          <a:blip xmlns:r="http://schemas.openxmlformats.org/officeDocument/2006/relationships" xmlns:a="http://schemas.openxmlformats.org/drawingml/2006/main" r:embed="R382123657cbd45a2">
+          <a:blip xmlns:r="http://schemas.openxmlformats.org/officeDocument/2006/relationships" xmlns:a="http://schemas.openxmlformats.org/drawingml/2006/main" r:embed="R88db77f089704584">
             <a:alphaModFix amt="28000"/>
           </a:blip>
           <a:stretch xmlns:a="http://schemas.openxmlformats.org/drawingml/2006/main"/>
@@ -1899,7 +1899,7 @@
           <p:nvPr/>
         </p:nvPicPr>
         <p:blipFill rotWithShape="1">
-          <a:blip xmlns:r="http://schemas.openxmlformats.org/officeDocument/2006/relationships" xmlns:a="http://schemas.openxmlformats.org/drawingml/2006/main" r:embed="R2fb8c0af9002478b">
+          <a:blip xmlns:r="http://schemas.openxmlformats.org/officeDocument/2006/relationships" xmlns:a="http://schemas.openxmlformats.org/drawingml/2006/main" r:embed="R13062ac5be554b51">
             <a:alphaModFix amt="28000"/>
           </a:blip>
           <a:stretch xmlns:a="http://schemas.openxmlformats.org/drawingml/2006/main"/>
@@ -2176,7 +2176,7 @@
           <p:nvPr/>
         </p:nvPicPr>
         <p:blipFill rotWithShape="1">
-          <a:blip xmlns:r="http://schemas.openxmlformats.org/officeDocument/2006/relationships" xmlns:a="http://schemas.openxmlformats.org/drawingml/2006/main" r:embed="R4a4a7a83a8b4431a">
+          <a:blip xmlns:r="http://schemas.openxmlformats.org/officeDocument/2006/relationships" xmlns:a="http://schemas.openxmlformats.org/drawingml/2006/main" r:embed="Reaa17af71ed445c0">
             <a:alphaModFix amt="28000"/>
           </a:blip>
           <a:stretch xmlns:a="http://schemas.openxmlformats.org/drawingml/2006/main"/>
@@ -2451,7 +2451,7 @@
           <p:nvPr/>
         </p:nvPicPr>
         <p:blipFill rotWithShape="1">
-          <a:blip xmlns:r="http://schemas.openxmlformats.org/officeDocument/2006/relationships" xmlns:a="http://schemas.openxmlformats.org/drawingml/2006/main" r:embed="Re3e561aef7eb49d1">
+          <a:blip xmlns:r="http://schemas.openxmlformats.org/officeDocument/2006/relationships" xmlns:a="http://schemas.openxmlformats.org/drawingml/2006/main" r:embed="R54cb84c0ef774955">
             <a:alphaModFix amt="28000"/>
           </a:blip>
           <a:stretch xmlns:a="http://schemas.openxmlformats.org/drawingml/2006/main"/>
@@ -2875,7 +2875,7 @@
           <p:nvPr/>
         </p:nvPicPr>
         <p:blipFill rotWithShape="1">
-          <a:blip xmlns:r="http://schemas.openxmlformats.org/officeDocument/2006/relationships" xmlns:a="http://schemas.openxmlformats.org/drawingml/2006/main" r:embed="Re26c439166b44a6f">
+          <a:blip xmlns:r="http://schemas.openxmlformats.org/officeDocument/2006/relationships" xmlns:a="http://schemas.openxmlformats.org/drawingml/2006/main" r:embed="R5d9b192d4f25498d">
             <a:alphaModFix amt="28000"/>
           </a:blip>
           <a:stretch xmlns:a="http://schemas.openxmlformats.org/drawingml/2006/main"/>
@@ -3016,7 +3016,7 @@
           <p:nvPr/>
         </p:nvPicPr>
         <p:blipFill rotWithShape="1">
-          <a:blip xmlns:r="http://schemas.openxmlformats.org/officeDocument/2006/relationships" xmlns:a="http://schemas.openxmlformats.org/drawingml/2006/main" r:embed="Raa83ee9c6e464c82">
+          <a:blip xmlns:r="http://schemas.openxmlformats.org/officeDocument/2006/relationships" xmlns:a="http://schemas.openxmlformats.org/drawingml/2006/main" r:embed="R1ab0ab2fdb544b55">
             <a:alphaModFix amt="28000"/>
           </a:blip>
           <a:stretch xmlns:a="http://schemas.openxmlformats.org/drawingml/2006/main"/>
@@ -3130,7 +3130,7 @@
           <p:nvPr/>
         </p:nvPicPr>
         <p:blipFill rotWithShape="1">
-          <a:blip xmlns:r="http://schemas.openxmlformats.org/officeDocument/2006/relationships" xmlns:a="http://schemas.openxmlformats.org/drawingml/2006/main" r:embed="R76b14a4afe274c0d">
+          <a:blip xmlns:r="http://schemas.openxmlformats.org/officeDocument/2006/relationships" xmlns:a="http://schemas.openxmlformats.org/drawingml/2006/main" r:embed="R6bd88b8af0f747f7">
             <a:alphaModFix amt="28000"/>
           </a:blip>
           <a:stretch xmlns:a="http://schemas.openxmlformats.org/drawingml/2006/main"/>
@@ -3457,7 +3457,7 @@
           <p:nvPr/>
         </p:nvPicPr>
         <p:blipFill rotWithShape="1">
-          <a:blip xmlns:r="http://schemas.openxmlformats.org/officeDocument/2006/relationships" xmlns:a="http://schemas.openxmlformats.org/drawingml/2006/main" r:embed="R2e9c1c92779c44f8">
+          <a:blip xmlns:r="http://schemas.openxmlformats.org/officeDocument/2006/relationships" xmlns:a="http://schemas.openxmlformats.org/drawingml/2006/main" r:embed="R91010fdc993f412c">
             <a:alphaModFix amt="28000"/>
           </a:blip>
           <a:stretch xmlns:a="http://schemas.openxmlformats.org/drawingml/2006/main"/>
@@ -3745,7 +3745,7 @@
           <p:nvPr/>
         </p:nvPicPr>
         <p:blipFill rotWithShape="1">
-          <a:blip xmlns:r="http://schemas.openxmlformats.org/officeDocument/2006/relationships" xmlns:a="http://schemas.openxmlformats.org/drawingml/2006/main" r:embed="Rc756355c8fcf4109">
+          <a:blip xmlns:r="http://schemas.openxmlformats.org/officeDocument/2006/relationships" xmlns:a="http://schemas.openxmlformats.org/drawingml/2006/main" r:embed="R1755935b94b144c7">
             <a:alphaModFix amt="28000"/>
           </a:blip>
           <a:stretch xmlns:a="http://schemas.openxmlformats.org/drawingml/2006/main"/>
@@ -3982,17 +3982,17 @@
   </p:cSld>
   <p:clrMap bg1="lt1" tx1="dk1" bg2="lt2" tx2="dk2" accent1="accent1" accent2="accent2" accent3="accent3" accent4="accent4" accent5="accent5" accent6="accent6" hlink="hlink" folHlink="folHlink"/>
   <p:sldLayoutIdLst>
-    <p:sldLayoutId xmlns:r="http://schemas.openxmlformats.org/officeDocument/2006/relationships" id="2147483649" r:id="R0d4cc345c24947f8"/>
-    <p:sldLayoutId xmlns:r="http://schemas.openxmlformats.org/officeDocument/2006/relationships" id="2147483650" r:id="R91119a66e6da4527"/>
-    <p:sldLayoutId xmlns:r="http://schemas.openxmlformats.org/officeDocument/2006/relationships" id="2147483651" r:id="R3079bc8a025847ad"/>
-    <p:sldLayoutId xmlns:r="http://schemas.openxmlformats.org/officeDocument/2006/relationships" id="2147483652" r:id="R0ddbe86b2af541b4"/>
-    <p:sldLayoutId xmlns:r="http://schemas.openxmlformats.org/officeDocument/2006/relationships" id="2147483653" r:id="R3180fd76676c477a"/>
-    <p:sldLayoutId xmlns:r="http://schemas.openxmlformats.org/officeDocument/2006/relationships" id="2147483654" r:id="R8c1abed622674852"/>
-    <p:sldLayoutId xmlns:r="http://schemas.openxmlformats.org/officeDocument/2006/relationships" id="2147483655" r:id="Re46058a43f6842b2"/>
-    <p:sldLayoutId xmlns:r="http://schemas.openxmlformats.org/officeDocument/2006/relationships" id="2147483656" r:id="R9f58ed01cd164e4d"/>
-    <p:sldLayoutId xmlns:r="http://schemas.openxmlformats.org/officeDocument/2006/relationships" id="2147483657" r:id="R44e953e28bd24eb8"/>
-    <p:sldLayoutId xmlns:r="http://schemas.openxmlformats.org/officeDocument/2006/relationships" id="2147483658" r:id="R1931271c8af94550"/>
-    <p:sldLayoutId xmlns:r="http://schemas.openxmlformats.org/officeDocument/2006/relationships" id="2147483659" r:id="R542895f7bf574bd9"/>
+    <p:sldLayoutId xmlns:r="http://schemas.openxmlformats.org/officeDocument/2006/relationships" id="2147483649" r:id="R1de2cc56f6404ddc"/>
+    <p:sldLayoutId xmlns:r="http://schemas.openxmlformats.org/officeDocument/2006/relationships" id="2147483650" r:id="Rd9c582f5743c40c2"/>
+    <p:sldLayoutId xmlns:r="http://schemas.openxmlformats.org/officeDocument/2006/relationships" id="2147483651" r:id="Rc4b6cab370f9457b"/>
+    <p:sldLayoutId xmlns:r="http://schemas.openxmlformats.org/officeDocument/2006/relationships" id="2147483652" r:id="R2d6aa0aea9204e6a"/>
+    <p:sldLayoutId xmlns:r="http://schemas.openxmlformats.org/officeDocument/2006/relationships" id="2147483653" r:id="R0b6e2c96d1434567"/>
+    <p:sldLayoutId xmlns:r="http://schemas.openxmlformats.org/officeDocument/2006/relationships" id="2147483654" r:id="R3303467eb1b44ba8"/>
+    <p:sldLayoutId xmlns:r="http://schemas.openxmlformats.org/officeDocument/2006/relationships" id="2147483655" r:id="Rb241706260a348d8"/>
+    <p:sldLayoutId xmlns:r="http://schemas.openxmlformats.org/officeDocument/2006/relationships" id="2147483656" r:id="Rd4334aafdb1840f2"/>
+    <p:sldLayoutId xmlns:r="http://schemas.openxmlformats.org/officeDocument/2006/relationships" id="2147483657" r:id="Rb098d063da25477c"/>
+    <p:sldLayoutId xmlns:r="http://schemas.openxmlformats.org/officeDocument/2006/relationships" id="2147483658" r:id="Re9c1b2a362e844af"/>
+    <p:sldLayoutId xmlns:r="http://schemas.openxmlformats.org/officeDocument/2006/relationships" id="2147483659" r:id="R076b90bf2f774155"/>
   </p:sldLayoutIdLst>
   <p:hf hdr="0" ftr="0" dt="0"/>
   <p:txStyles>

--- a/Mapped Curriculum Lessons/Grade 7/Lesson 14 - Changing Text Case/Changing Text Case - Slides.pptx
+++ b/Mapped Curriculum Lessons/Grade 7/Lesson 14 - Changing Text Case/Changing Text Case - Slides.pptx
@@ -2,28 +2,28 @@
 <file path=ppt/presentation.xml><?xml version="1.0" encoding="utf-8"?>
 <p:presentation xmlns:p="http://schemas.openxmlformats.org/presentationml/2006/main" embedTrueTypeFonts="1" saveSubsetFonts="0">
   <p:sldMasterIdLst>
-    <p:sldMasterId xmlns:r="http://schemas.openxmlformats.org/officeDocument/2006/relationships" id="2147483648" r:id="Rec736d6efb014521"/>
+    <p:sldMasterId xmlns:r="http://schemas.openxmlformats.org/officeDocument/2006/relationships" id="2147483648" r:id="R603b05cd1c714269"/>
   </p:sldMasterIdLst>
   <p:notesMasterIdLst>
-    <p:notesMasterId xmlns:r="http://schemas.openxmlformats.org/officeDocument/2006/relationships" r:id="Rf6504696bcb54b59"/>
+    <p:notesMasterId xmlns:r="http://schemas.openxmlformats.org/officeDocument/2006/relationships" r:id="R5fafc7a87eb94aaf"/>
   </p:notesMasterIdLst>
   <p:sldIdLst>
-    <p:sldId xmlns:r="http://schemas.openxmlformats.org/officeDocument/2006/relationships" id="256" r:id="R694909243d664250"/>
-    <p:sldId xmlns:r="http://schemas.openxmlformats.org/officeDocument/2006/relationships" id="257" r:id="R740d74d385b047b1"/>
-    <p:sldId xmlns:r="http://schemas.openxmlformats.org/officeDocument/2006/relationships" id="258" r:id="R62bfbb9f1fb44aa6"/>
-    <p:sldId xmlns:r="http://schemas.openxmlformats.org/officeDocument/2006/relationships" id="259" r:id="R68c258dc1d1b4331"/>
-    <p:sldId xmlns:r="http://schemas.openxmlformats.org/officeDocument/2006/relationships" id="260" r:id="R350385dff9234d83"/>
-    <p:sldId xmlns:r="http://schemas.openxmlformats.org/officeDocument/2006/relationships" id="261" r:id="R57eab040866441d0"/>
-    <p:sldId xmlns:r="http://schemas.openxmlformats.org/officeDocument/2006/relationships" id="262" r:id="R104e81b5111a4b8a"/>
-    <p:sldId xmlns:r="http://schemas.openxmlformats.org/officeDocument/2006/relationships" id="263" r:id="R95640da912334b9e"/>
-    <p:sldId xmlns:r="http://schemas.openxmlformats.org/officeDocument/2006/relationships" id="264" r:id="Ra1fb2d0c15684e18"/>
+    <p:sldId xmlns:r="http://schemas.openxmlformats.org/officeDocument/2006/relationships" id="256" r:id="R7650c4b5a18a4abb"/>
+    <p:sldId xmlns:r="http://schemas.openxmlformats.org/officeDocument/2006/relationships" id="257" r:id="Rd603d3da9f5a40f8"/>
+    <p:sldId xmlns:r="http://schemas.openxmlformats.org/officeDocument/2006/relationships" id="258" r:id="R448fdf5f2a6f404f"/>
+    <p:sldId xmlns:r="http://schemas.openxmlformats.org/officeDocument/2006/relationships" id="259" r:id="R7882f1782490491a"/>
+    <p:sldId xmlns:r="http://schemas.openxmlformats.org/officeDocument/2006/relationships" id="260" r:id="R69ea043b001b457a"/>
+    <p:sldId xmlns:r="http://schemas.openxmlformats.org/officeDocument/2006/relationships" id="261" r:id="R58aa48b2cb734d83"/>
+    <p:sldId xmlns:r="http://schemas.openxmlformats.org/officeDocument/2006/relationships" id="262" r:id="R5ddb3d7841bb40a4"/>
+    <p:sldId xmlns:r="http://schemas.openxmlformats.org/officeDocument/2006/relationships" id="263" r:id="R9deb8f4204bc4dba"/>
+    <p:sldId xmlns:r="http://schemas.openxmlformats.org/officeDocument/2006/relationships" id="264" r:id="Rff9787a58573469c"/>
   </p:sldIdLst>
   <p:sldSz cx="12192000" cy="6858000"/>
   <p:notesSz cx="6858000" cy="9144000"/>
   <p:embeddedFontLst>
     <p:embeddedFont>
       <p:font typeface="JetBrains Mono"/>
-      <p:regular xmlns:r="http://schemas.openxmlformats.org/officeDocument/2006/relationships" r:id="Raec53b373d2a40e9"/>
+      <p:regular xmlns:r="http://schemas.openxmlformats.org/officeDocument/2006/relationships" r:id="R597e20db7d72430d"/>
     </p:embeddedFont>
   </p:embeddedFontLst>
 </p:presentation>
@@ -1071,7 +1071,7 @@
           <p:nvPr/>
         </p:nvPicPr>
         <p:blipFill rotWithShape="1">
-          <a:blip xmlns:r="http://schemas.openxmlformats.org/officeDocument/2006/relationships" xmlns:a="http://schemas.openxmlformats.org/drawingml/2006/main" r:embed="R1737de0c0cf44b65"/>
+          <a:blip xmlns:r="http://schemas.openxmlformats.org/officeDocument/2006/relationships" xmlns:a="http://schemas.openxmlformats.org/drawingml/2006/main" r:embed="R1b0bb3861b3b491c"/>
           <a:stretch xmlns:a="http://schemas.openxmlformats.org/drawingml/2006/main"/>
         </p:blipFill>
         <p:spPr>
@@ -1451,7 +1451,7 @@
           <p:nvPr/>
         </p:nvPicPr>
         <p:blipFill rotWithShape="1">
-          <a:blip xmlns:r="http://schemas.openxmlformats.org/officeDocument/2006/relationships" xmlns:a="http://schemas.openxmlformats.org/drawingml/2006/main" r:embed="Rd8cbe73798d64878">
+          <a:blip xmlns:r="http://schemas.openxmlformats.org/officeDocument/2006/relationships" xmlns:a="http://schemas.openxmlformats.org/drawingml/2006/main" r:embed="R23d21f163ffb437b">
             <a:alphaModFix amt="28000"/>
           </a:blip>
           <a:stretch xmlns:a="http://schemas.openxmlformats.org/drawingml/2006/main"/>
@@ -1664,7 +1664,7 @@
           <p:nvPr/>
         </p:nvPicPr>
         <p:blipFill rotWithShape="1">
-          <a:blip xmlns:r="http://schemas.openxmlformats.org/officeDocument/2006/relationships" xmlns:a="http://schemas.openxmlformats.org/drawingml/2006/main" r:embed="R88db77f089704584">
+          <a:blip xmlns:r="http://schemas.openxmlformats.org/officeDocument/2006/relationships" xmlns:a="http://schemas.openxmlformats.org/drawingml/2006/main" r:embed="R54478a4f1de44c53">
             <a:alphaModFix amt="28000"/>
           </a:blip>
           <a:stretch xmlns:a="http://schemas.openxmlformats.org/drawingml/2006/main"/>
@@ -1899,7 +1899,7 @@
           <p:nvPr/>
         </p:nvPicPr>
         <p:blipFill rotWithShape="1">
-          <a:blip xmlns:r="http://schemas.openxmlformats.org/officeDocument/2006/relationships" xmlns:a="http://schemas.openxmlformats.org/drawingml/2006/main" r:embed="R13062ac5be554b51">
+          <a:blip xmlns:r="http://schemas.openxmlformats.org/officeDocument/2006/relationships" xmlns:a="http://schemas.openxmlformats.org/drawingml/2006/main" r:embed="R9fd284812e96430d">
             <a:alphaModFix amt="28000"/>
           </a:blip>
           <a:stretch xmlns:a="http://schemas.openxmlformats.org/drawingml/2006/main"/>
@@ -2176,7 +2176,7 @@
           <p:nvPr/>
         </p:nvPicPr>
         <p:blipFill rotWithShape="1">
-          <a:blip xmlns:r="http://schemas.openxmlformats.org/officeDocument/2006/relationships" xmlns:a="http://schemas.openxmlformats.org/drawingml/2006/main" r:embed="Reaa17af71ed445c0">
+          <a:blip xmlns:r="http://schemas.openxmlformats.org/officeDocument/2006/relationships" xmlns:a="http://schemas.openxmlformats.org/drawingml/2006/main" r:embed="Rbf91862ef43042f7">
             <a:alphaModFix amt="28000"/>
           </a:blip>
           <a:stretch xmlns:a="http://schemas.openxmlformats.org/drawingml/2006/main"/>
@@ -2451,7 +2451,7 @@
           <p:nvPr/>
         </p:nvPicPr>
         <p:blipFill rotWithShape="1">
-          <a:blip xmlns:r="http://schemas.openxmlformats.org/officeDocument/2006/relationships" xmlns:a="http://schemas.openxmlformats.org/drawingml/2006/main" r:embed="R54cb84c0ef774955">
+          <a:blip xmlns:r="http://schemas.openxmlformats.org/officeDocument/2006/relationships" xmlns:a="http://schemas.openxmlformats.org/drawingml/2006/main" r:embed="R6521a92aaeb1486c">
             <a:alphaModFix amt="28000"/>
           </a:blip>
           <a:stretch xmlns:a="http://schemas.openxmlformats.org/drawingml/2006/main"/>
@@ -2875,7 +2875,7 @@
           <p:nvPr/>
         </p:nvPicPr>
         <p:blipFill rotWithShape="1">
-          <a:blip xmlns:r="http://schemas.openxmlformats.org/officeDocument/2006/relationships" xmlns:a="http://schemas.openxmlformats.org/drawingml/2006/main" r:embed="R5d9b192d4f25498d">
+          <a:blip xmlns:r="http://schemas.openxmlformats.org/officeDocument/2006/relationships" xmlns:a="http://schemas.openxmlformats.org/drawingml/2006/main" r:embed="R65b6f7815fe94ebd">
             <a:alphaModFix amt="28000"/>
           </a:blip>
           <a:stretch xmlns:a="http://schemas.openxmlformats.org/drawingml/2006/main"/>
@@ -3016,7 +3016,7 @@
           <p:nvPr/>
         </p:nvPicPr>
         <p:blipFill rotWithShape="1">
-          <a:blip xmlns:r="http://schemas.openxmlformats.org/officeDocument/2006/relationships" xmlns:a="http://schemas.openxmlformats.org/drawingml/2006/main" r:embed="R1ab0ab2fdb544b55">
+          <a:blip xmlns:r="http://schemas.openxmlformats.org/officeDocument/2006/relationships" xmlns:a="http://schemas.openxmlformats.org/drawingml/2006/main" r:embed="R93728c5884964386">
             <a:alphaModFix amt="28000"/>
           </a:blip>
           <a:stretch xmlns:a="http://schemas.openxmlformats.org/drawingml/2006/main"/>
@@ -3130,7 +3130,7 @@
           <p:nvPr/>
         </p:nvPicPr>
         <p:blipFill rotWithShape="1">
-          <a:blip xmlns:r="http://schemas.openxmlformats.org/officeDocument/2006/relationships" xmlns:a="http://schemas.openxmlformats.org/drawingml/2006/main" r:embed="R6bd88b8af0f747f7">
+          <a:blip xmlns:r="http://schemas.openxmlformats.org/officeDocument/2006/relationships" xmlns:a="http://schemas.openxmlformats.org/drawingml/2006/main" r:embed="Rbec1650c6bc84d3e">
             <a:alphaModFix amt="28000"/>
           </a:blip>
           <a:stretch xmlns:a="http://schemas.openxmlformats.org/drawingml/2006/main"/>
@@ -3457,7 +3457,7 @@
           <p:nvPr/>
         </p:nvPicPr>
         <p:blipFill rotWithShape="1">
-          <a:blip xmlns:r="http://schemas.openxmlformats.org/officeDocument/2006/relationships" xmlns:a="http://schemas.openxmlformats.org/drawingml/2006/main" r:embed="R91010fdc993f412c">
+          <a:blip xmlns:r="http://schemas.openxmlformats.org/officeDocument/2006/relationships" xmlns:a="http://schemas.openxmlformats.org/drawingml/2006/main" r:embed="R9d5491392ecb4ad9">
             <a:alphaModFix amt="28000"/>
           </a:blip>
           <a:stretch xmlns:a="http://schemas.openxmlformats.org/drawingml/2006/main"/>
@@ -3745,7 +3745,7 @@
           <p:nvPr/>
         </p:nvPicPr>
         <p:blipFill rotWithShape="1">
-          <a:blip xmlns:r="http://schemas.openxmlformats.org/officeDocument/2006/relationships" xmlns:a="http://schemas.openxmlformats.org/drawingml/2006/main" r:embed="R1755935b94b144c7">
+          <a:blip xmlns:r="http://schemas.openxmlformats.org/officeDocument/2006/relationships" xmlns:a="http://schemas.openxmlformats.org/drawingml/2006/main" r:embed="R63fb9eb7d6084d9f">
             <a:alphaModFix amt="28000"/>
           </a:blip>
           <a:stretch xmlns:a="http://schemas.openxmlformats.org/drawingml/2006/main"/>
@@ -3982,17 +3982,17 @@
   </p:cSld>
   <p:clrMap bg1="lt1" tx1="dk1" bg2="lt2" tx2="dk2" accent1="accent1" accent2="accent2" accent3="accent3" accent4="accent4" accent5="accent5" accent6="accent6" hlink="hlink" folHlink="folHlink"/>
   <p:sldLayoutIdLst>
-    <p:sldLayoutId xmlns:r="http://schemas.openxmlformats.org/officeDocument/2006/relationships" id="2147483649" r:id="R1de2cc56f6404ddc"/>
-    <p:sldLayoutId xmlns:r="http://schemas.openxmlformats.org/officeDocument/2006/relationships" id="2147483650" r:id="Rd9c582f5743c40c2"/>
-    <p:sldLayoutId xmlns:r="http://schemas.openxmlformats.org/officeDocument/2006/relationships" id="2147483651" r:id="Rc4b6cab370f9457b"/>
-    <p:sldLayoutId xmlns:r="http://schemas.openxmlformats.org/officeDocument/2006/relationships" id="2147483652" r:id="R2d6aa0aea9204e6a"/>
-    <p:sldLayoutId xmlns:r="http://schemas.openxmlformats.org/officeDocument/2006/relationships" id="2147483653" r:id="R0b6e2c96d1434567"/>
-    <p:sldLayoutId xmlns:r="http://schemas.openxmlformats.org/officeDocument/2006/relationships" id="2147483654" r:id="R3303467eb1b44ba8"/>
-    <p:sldLayoutId xmlns:r="http://schemas.openxmlformats.org/officeDocument/2006/relationships" id="2147483655" r:id="Rb241706260a348d8"/>
-    <p:sldLayoutId xmlns:r="http://schemas.openxmlformats.org/officeDocument/2006/relationships" id="2147483656" r:id="Rd4334aafdb1840f2"/>
-    <p:sldLayoutId xmlns:r="http://schemas.openxmlformats.org/officeDocument/2006/relationships" id="2147483657" r:id="Rb098d063da25477c"/>
-    <p:sldLayoutId xmlns:r="http://schemas.openxmlformats.org/officeDocument/2006/relationships" id="2147483658" r:id="Re9c1b2a362e844af"/>
-    <p:sldLayoutId xmlns:r="http://schemas.openxmlformats.org/officeDocument/2006/relationships" id="2147483659" r:id="R076b90bf2f774155"/>
+    <p:sldLayoutId xmlns:r="http://schemas.openxmlformats.org/officeDocument/2006/relationships" id="2147483649" r:id="Rae1854d6b81c46fa"/>
+    <p:sldLayoutId xmlns:r="http://schemas.openxmlformats.org/officeDocument/2006/relationships" id="2147483650" r:id="Rd27566c11bae4778"/>
+    <p:sldLayoutId xmlns:r="http://schemas.openxmlformats.org/officeDocument/2006/relationships" id="2147483651" r:id="R93da148314ba4ce8"/>
+    <p:sldLayoutId xmlns:r="http://schemas.openxmlformats.org/officeDocument/2006/relationships" id="2147483652" r:id="Rd9ba6f245402407d"/>
+    <p:sldLayoutId xmlns:r="http://schemas.openxmlformats.org/officeDocument/2006/relationships" id="2147483653" r:id="Ra76c8bd756a64920"/>
+    <p:sldLayoutId xmlns:r="http://schemas.openxmlformats.org/officeDocument/2006/relationships" id="2147483654" r:id="Rab2a3e536c804089"/>
+    <p:sldLayoutId xmlns:r="http://schemas.openxmlformats.org/officeDocument/2006/relationships" id="2147483655" r:id="Rc201a8594ae74d04"/>
+    <p:sldLayoutId xmlns:r="http://schemas.openxmlformats.org/officeDocument/2006/relationships" id="2147483656" r:id="Rbb926cf6b6184e36"/>
+    <p:sldLayoutId xmlns:r="http://schemas.openxmlformats.org/officeDocument/2006/relationships" id="2147483657" r:id="R463bb8783f404848"/>
+    <p:sldLayoutId xmlns:r="http://schemas.openxmlformats.org/officeDocument/2006/relationships" id="2147483658" r:id="Rca936d6dbd2242fe"/>
+    <p:sldLayoutId xmlns:r="http://schemas.openxmlformats.org/officeDocument/2006/relationships" id="2147483659" r:id="R997c78ef45d6488c"/>
   </p:sldLayoutIdLst>
   <p:hf hdr="0" ftr="0" dt="0"/>
   <p:txStyles>
